--- a/exports/pptx/lessons/senior-module-08-yoga/day-07-modern-yoga.pptx
+++ b/exports/pptx/lessons/senior-module-08-yoga/day-07-modern-yoga.pptx
@@ -16,9 +16,13 @@
     <p:sldId id="264" r:id="rId10"/>
     <p:sldId id="265" r:id="rId11"/>
     <p:sldId id="266" r:id="rId12"/>
+    <p:sldId id="267" r:id="rId13"/>
+    <p:sldId id="268" r:id="rId14"/>
+    <p:sldId id="269" r:id="rId15"/>
+    <p:sldId id="270" r:id="rId16"/>
   </p:sldIdLst>
   <p:notesMasterIdLst>
-    <p:notesMasterId r:id="rId13"/>
+    <p:notesMasterId r:id="rId17"/>
   </p:notesMasterIdLst>
   <p:sldSz cx="9144000" cy="5143500"/>
   <p:notesSz cx="5143500" cy="9144000"/>
@@ -712,6 +716,358 @@
             <a:fld id="{F7021451-1387-4CA6-816F-3879F97B5CBC}" type="slidenum">
               <a:rPr lang="en-US"/>
               <a:t>11</a:t>
+            </a:fld>
+            <a:endParaRPr lang="en-US"/>
+          </a:p>
+        </p:txBody>
+      </p:sp>
+    </p:spTree>
+    <p:extLst>
+      <p:ext uri="{BB962C8B-B14F-4D97-AF65-F5344CB8AC3E}">
+        <p14:creationId xmlns:p14="http://schemas.microsoft.com/office/powerpoint/2010/main" val="1024086991"/>
+      </p:ext>
+    </p:extLst>
+  </p:cSld>
+  <p:clrMapOvr>
+    <a:masterClrMapping/>
+  </p:clrMapOvr>
+</p:notes>
+</file>
+
+<file path=ppt/notesSlides/notesSlide12.xml><?xml version="1.0" encoding="utf-8"?>
+<p:notes xmlns:a="http://schemas.openxmlformats.org/drawingml/2006/main" xmlns:r="http://schemas.openxmlformats.org/officeDocument/2006/relationships" xmlns:p="http://schemas.openxmlformats.org/presentationml/2006/main">
+  <p:cSld>
+    <p:spTree>
+      <p:nvGrpSpPr>
+        <p:cNvPr id="1" name=""/>
+        <p:cNvGrpSpPr/>
+        <p:nvPr/>
+      </p:nvGrpSpPr>
+      <p:grpSpPr>
+        <a:xfrm>
+          <a:off x="0" y="0"/>
+          <a:ext cx="0" cy="0"/>
+          <a:chOff x="0" y="0"/>
+          <a:chExt cx="0" cy="0"/>
+        </a:xfrm>
+      </p:grpSpPr>
+      <p:sp>
+        <p:nvSpPr>
+          <p:cNvPr id="2" name="Slide Image Placeholder 1"/>
+          <p:cNvSpPr>
+            <a:spLocks noGrp="1" noRot="1" noChangeAspect="1"/>
+          </p:cNvSpPr>
+          <p:nvPr>
+            <p:ph type="sldImg"/>
+          </p:nvPr>
+        </p:nvSpPr>
+        <p:spPr/>
+      </p:sp>
+      <p:sp>
+        <p:nvSpPr>
+          <p:cNvPr id="3" name="Notes Placeholder 2"/>
+          <p:cNvSpPr>
+            <a:spLocks noGrp="1"/>
+          </p:cNvSpPr>
+          <p:nvPr>
+            <p:ph type="body" idx="1"/>
+          </p:nvPr>
+        </p:nvSpPr>
+        <p:spPr/>
+        <p:txBody>
+          <a:bodyPr/>
+          <a:lstStyle/>
+          <a:p>
+            <a:r>
+              <a:rPr lang="en-US" dirty="0"/>
+              <a:t/>
+            </a:r>
+            <a:endParaRPr lang="en-US" dirty="0"/>
+          </a:p>
+        </p:txBody>
+      </p:sp>
+      <p:sp>
+        <p:nvSpPr>
+          <p:cNvPr id="4" name="Slide Number Placeholder 3"/>
+          <p:cNvSpPr>
+            <a:spLocks noGrp="1"/>
+          </p:cNvSpPr>
+          <p:nvPr>
+            <p:ph type="sldNum" sz="quarter" idx="10"/>
+          </p:nvPr>
+        </p:nvSpPr>
+        <p:spPr/>
+        <p:txBody>
+          <a:bodyPr/>
+          <a:lstStyle/>
+          <a:p>
+            <a:fld id="{F7021451-1387-4CA6-816F-3879F97B5CBC}" type="slidenum">
+              <a:rPr lang="en-US"/>
+              <a:t>12</a:t>
+            </a:fld>
+            <a:endParaRPr lang="en-US"/>
+          </a:p>
+        </p:txBody>
+      </p:sp>
+    </p:spTree>
+    <p:extLst>
+      <p:ext uri="{BB962C8B-B14F-4D97-AF65-F5344CB8AC3E}">
+        <p14:creationId xmlns:p14="http://schemas.microsoft.com/office/powerpoint/2010/main" val="1024086991"/>
+      </p:ext>
+    </p:extLst>
+  </p:cSld>
+  <p:clrMapOvr>
+    <a:masterClrMapping/>
+  </p:clrMapOvr>
+</p:notes>
+</file>
+
+<file path=ppt/notesSlides/notesSlide13.xml><?xml version="1.0" encoding="utf-8"?>
+<p:notes xmlns:a="http://schemas.openxmlformats.org/drawingml/2006/main" xmlns:r="http://schemas.openxmlformats.org/officeDocument/2006/relationships" xmlns:p="http://schemas.openxmlformats.org/presentationml/2006/main">
+  <p:cSld>
+    <p:spTree>
+      <p:nvGrpSpPr>
+        <p:cNvPr id="1" name=""/>
+        <p:cNvGrpSpPr/>
+        <p:nvPr/>
+      </p:nvGrpSpPr>
+      <p:grpSpPr>
+        <a:xfrm>
+          <a:off x="0" y="0"/>
+          <a:ext cx="0" cy="0"/>
+          <a:chOff x="0" y="0"/>
+          <a:chExt cx="0" cy="0"/>
+        </a:xfrm>
+      </p:grpSpPr>
+      <p:sp>
+        <p:nvSpPr>
+          <p:cNvPr id="2" name="Slide Image Placeholder 1"/>
+          <p:cNvSpPr>
+            <a:spLocks noGrp="1" noRot="1" noChangeAspect="1"/>
+          </p:cNvSpPr>
+          <p:nvPr>
+            <p:ph type="sldImg"/>
+          </p:nvPr>
+        </p:nvSpPr>
+        <p:spPr/>
+      </p:sp>
+      <p:sp>
+        <p:nvSpPr>
+          <p:cNvPr id="3" name="Notes Placeholder 2"/>
+          <p:cNvSpPr>
+            <a:spLocks noGrp="1"/>
+          </p:cNvSpPr>
+          <p:nvPr>
+            <p:ph type="body" idx="1"/>
+          </p:nvPr>
+        </p:nvSpPr>
+        <p:spPr/>
+        <p:txBody>
+          <a:bodyPr/>
+          <a:lstStyle/>
+          <a:p>
+            <a:r>
+              <a:rPr lang="en-US" dirty="0"/>
+              <a:t/>
+            </a:r>
+            <a:endParaRPr lang="en-US" dirty="0"/>
+          </a:p>
+        </p:txBody>
+      </p:sp>
+      <p:sp>
+        <p:nvSpPr>
+          <p:cNvPr id="4" name="Slide Number Placeholder 3"/>
+          <p:cNvSpPr>
+            <a:spLocks noGrp="1"/>
+          </p:cNvSpPr>
+          <p:nvPr>
+            <p:ph type="sldNum" sz="quarter" idx="10"/>
+          </p:nvPr>
+        </p:nvSpPr>
+        <p:spPr/>
+        <p:txBody>
+          <a:bodyPr/>
+          <a:lstStyle/>
+          <a:p>
+            <a:fld id="{F7021451-1387-4CA6-816F-3879F97B5CBC}" type="slidenum">
+              <a:rPr lang="en-US"/>
+              <a:t>13</a:t>
+            </a:fld>
+            <a:endParaRPr lang="en-US"/>
+          </a:p>
+        </p:txBody>
+      </p:sp>
+    </p:spTree>
+    <p:extLst>
+      <p:ext uri="{BB962C8B-B14F-4D97-AF65-F5344CB8AC3E}">
+        <p14:creationId xmlns:p14="http://schemas.microsoft.com/office/powerpoint/2010/main" val="1024086991"/>
+      </p:ext>
+    </p:extLst>
+  </p:cSld>
+  <p:clrMapOvr>
+    <a:masterClrMapping/>
+  </p:clrMapOvr>
+</p:notes>
+</file>
+
+<file path=ppt/notesSlides/notesSlide14.xml><?xml version="1.0" encoding="utf-8"?>
+<p:notes xmlns:a="http://schemas.openxmlformats.org/drawingml/2006/main" xmlns:r="http://schemas.openxmlformats.org/officeDocument/2006/relationships" xmlns:p="http://schemas.openxmlformats.org/presentationml/2006/main">
+  <p:cSld>
+    <p:spTree>
+      <p:nvGrpSpPr>
+        <p:cNvPr id="1" name=""/>
+        <p:cNvGrpSpPr/>
+        <p:nvPr/>
+      </p:nvGrpSpPr>
+      <p:grpSpPr>
+        <a:xfrm>
+          <a:off x="0" y="0"/>
+          <a:ext cx="0" cy="0"/>
+          <a:chOff x="0" y="0"/>
+          <a:chExt cx="0" cy="0"/>
+        </a:xfrm>
+      </p:grpSpPr>
+      <p:sp>
+        <p:nvSpPr>
+          <p:cNvPr id="2" name="Slide Image Placeholder 1"/>
+          <p:cNvSpPr>
+            <a:spLocks noGrp="1" noRot="1" noChangeAspect="1"/>
+          </p:cNvSpPr>
+          <p:nvPr>
+            <p:ph type="sldImg"/>
+          </p:nvPr>
+        </p:nvSpPr>
+        <p:spPr/>
+      </p:sp>
+      <p:sp>
+        <p:nvSpPr>
+          <p:cNvPr id="3" name="Notes Placeholder 2"/>
+          <p:cNvSpPr>
+            <a:spLocks noGrp="1"/>
+          </p:cNvSpPr>
+          <p:nvPr>
+            <p:ph type="body" idx="1"/>
+          </p:nvPr>
+        </p:nvSpPr>
+        <p:spPr/>
+        <p:txBody>
+          <a:bodyPr/>
+          <a:lstStyle/>
+          <a:p>
+            <a:r>
+              <a:rPr lang="en-US" dirty="0"/>
+              <a:t/>
+            </a:r>
+            <a:endParaRPr lang="en-US" dirty="0"/>
+          </a:p>
+        </p:txBody>
+      </p:sp>
+      <p:sp>
+        <p:nvSpPr>
+          <p:cNvPr id="4" name="Slide Number Placeholder 3"/>
+          <p:cNvSpPr>
+            <a:spLocks noGrp="1"/>
+          </p:cNvSpPr>
+          <p:nvPr>
+            <p:ph type="sldNum" sz="quarter" idx="10"/>
+          </p:nvPr>
+        </p:nvSpPr>
+        <p:spPr/>
+        <p:txBody>
+          <a:bodyPr/>
+          <a:lstStyle/>
+          <a:p>
+            <a:fld id="{F7021451-1387-4CA6-816F-3879F97B5CBC}" type="slidenum">
+              <a:rPr lang="en-US"/>
+              <a:t>14</a:t>
+            </a:fld>
+            <a:endParaRPr lang="en-US"/>
+          </a:p>
+        </p:txBody>
+      </p:sp>
+    </p:spTree>
+    <p:extLst>
+      <p:ext uri="{BB962C8B-B14F-4D97-AF65-F5344CB8AC3E}">
+        <p14:creationId xmlns:p14="http://schemas.microsoft.com/office/powerpoint/2010/main" val="1024086991"/>
+      </p:ext>
+    </p:extLst>
+  </p:cSld>
+  <p:clrMapOvr>
+    <a:masterClrMapping/>
+  </p:clrMapOvr>
+</p:notes>
+</file>
+
+<file path=ppt/notesSlides/notesSlide15.xml><?xml version="1.0" encoding="utf-8"?>
+<p:notes xmlns:a="http://schemas.openxmlformats.org/drawingml/2006/main" xmlns:r="http://schemas.openxmlformats.org/officeDocument/2006/relationships" xmlns:p="http://schemas.openxmlformats.org/presentationml/2006/main">
+  <p:cSld>
+    <p:spTree>
+      <p:nvGrpSpPr>
+        <p:cNvPr id="1" name=""/>
+        <p:cNvGrpSpPr/>
+        <p:nvPr/>
+      </p:nvGrpSpPr>
+      <p:grpSpPr>
+        <a:xfrm>
+          <a:off x="0" y="0"/>
+          <a:ext cx="0" cy="0"/>
+          <a:chOff x="0" y="0"/>
+          <a:chExt cx="0" cy="0"/>
+        </a:xfrm>
+      </p:grpSpPr>
+      <p:sp>
+        <p:nvSpPr>
+          <p:cNvPr id="2" name="Slide Image Placeholder 1"/>
+          <p:cNvSpPr>
+            <a:spLocks noGrp="1" noRot="1" noChangeAspect="1"/>
+          </p:cNvSpPr>
+          <p:nvPr>
+            <p:ph type="sldImg"/>
+          </p:nvPr>
+        </p:nvSpPr>
+        <p:spPr/>
+      </p:sp>
+      <p:sp>
+        <p:nvSpPr>
+          <p:cNvPr id="3" name="Notes Placeholder 2"/>
+          <p:cNvSpPr>
+            <a:spLocks noGrp="1"/>
+          </p:cNvSpPr>
+          <p:nvPr>
+            <p:ph type="body" idx="1"/>
+          </p:nvPr>
+        </p:nvSpPr>
+        <p:spPr/>
+        <p:txBody>
+          <a:bodyPr/>
+          <a:lstStyle/>
+          <a:p>
+            <a:r>
+              <a:rPr lang="en-US" dirty="0"/>
+              <a:t/>
+            </a:r>
+            <a:endParaRPr lang="en-US" dirty="0"/>
+          </a:p>
+        </p:txBody>
+      </p:sp>
+      <p:sp>
+        <p:nvSpPr>
+          <p:cNvPr id="4" name="Slide Number Placeholder 3"/>
+          <p:cNvSpPr>
+            <a:spLocks noGrp="1"/>
+          </p:cNvSpPr>
+          <p:nvPr>
+            <p:ph type="sldNum" sz="quarter" idx="10"/>
+          </p:nvPr>
+        </p:nvSpPr>
+        <p:spPr/>
+        <p:txBody>
+          <a:bodyPr/>
+          <a:lstStyle/>
+          <a:p>
+            <a:fld id="{F7021451-1387-4CA6-816F-3879F97B5CBC}" type="slidenum">
+              <a:rPr lang="en-US"/>
+              <a:t>15</a:t>
             </a:fld>
             <a:endParaRPr lang="en-US"/>
           </a:p>
@@ -1965,102 +2321,6 @@
         </p:nvSpPr>
         <p:spPr>
           <a:xfrm>
-            <a:off x="406301" y="1223963"/>
-            <a:ext cx="8498026" cy="274290"/>
-          </a:xfrm>
-          <a:prstGeom prst="rect">
-            <a:avLst/>
-          </a:prstGeom>
-          <a:noFill/>
-          <a:ln/>
-        </p:spPr>
-        <p:txBody>
-          <a:bodyPr wrap="square" lIns="0" tIns="0" rIns="0" bIns="0" rtlCol="0" anchor="t"/>
-          <a:lstStyle/>
-          <a:p>
-            <a:pPr algn="l" indent="0" marL="0">
-              <a:lnSpc>
-                <a:spcPts val="2160"/>
-              </a:lnSpc>
-              <a:spcBef>
-                <a:spcPts val="600"/>
-              </a:spcBef>
-              <a:spcAft>
-                <a:spcPts val="800"/>
-              </a:spcAft>
-              <a:buNone/>
-            </a:pPr>
-            <a:r>
-              <a:rPr lang="en-US" sz="1800" b="1" dirty="0">
-                <a:solidFill>
-                  <a:srgbClr val="997929"/>
-                </a:solidFill>
-                <a:latin typeface="Times New Roman" pitchFamily="34" charset="0"/>
-                <a:ea typeface="Times New Roman" pitchFamily="34" charset="-122"/>
-                <a:cs typeface="Times New Roman" pitchFamily="34" charset="-120"/>
-              </a:rPr>
-              <a:t>Learning objective</a:t>
-            </a:r>
-            <a:endParaRPr lang="en-US" sz="1800" dirty="0"/>
-          </a:p>
-        </p:txBody>
-      </p:sp>
-      <p:sp>
-        <p:nvSpPr>
-          <p:cNvPr id="6" name="Text 4"/>
-          <p:cNvSpPr/>
-          <p:nvPr/>
-        </p:nvSpPr>
-        <p:spPr>
-          <a:xfrm>
-            <a:off x="406301" y="1637854"/>
-            <a:ext cx="8498026" cy="426541"/>
-          </a:xfrm>
-          <a:prstGeom prst="rect">
-            <a:avLst/>
-          </a:prstGeom>
-          <a:noFill/>
-          <a:ln/>
-        </p:spPr>
-        <p:txBody>
-          <a:bodyPr wrap="square" lIns="0" tIns="0" rIns="0" bIns="0" rtlCol="0" anchor="t"/>
-          <a:lstStyle/>
-          <a:p>
-            <a:pPr algn="l" indent="0" marL="0">
-              <a:lnSpc>
-                <a:spcPts val="1680"/>
-              </a:lnSpc>
-              <a:spcBef>
-                <a:spcPts val="300"/>
-              </a:spcBef>
-              <a:spcAft>
-                <a:spcPts val="300"/>
-              </a:spcAft>
-              <a:buNone/>
-            </a:pPr>
-            <a:r>
-              <a:rPr lang="en-US" sz="1200" dirty="0">
-                <a:solidFill>
-                  <a:srgbClr val="1A1A1A"/>
-                </a:solidFill>
-                <a:latin typeface="Georgia" pitchFamily="34" charset="0"/>
-                <a:ea typeface="Georgia" pitchFamily="34" charset="-122"/>
-                <a:cs typeface="Georgia" pitchFamily="34" charset="-120"/>
-              </a:rPr>
-              <a:t>Students engage Singleton's (2010) thesis that modern postural yoga is largely a 20th-century synthesis, articulate one strength and one weakness of that thesis, and discuss what is at stake.</a:t>
-            </a:r>
-            <a:endParaRPr lang="en-US" sz="1200" dirty="0"/>
-          </a:p>
-        </p:txBody>
-      </p:sp>
-      <p:sp>
-        <p:nvSpPr>
-          <p:cNvPr id="7" name="Text 5"/>
-          <p:cNvSpPr/>
-          <p:nvPr/>
-        </p:nvSpPr>
-        <p:spPr>
-          <a:xfrm>
             <a:off x="406301" y="4434929"/>
             <a:ext cx="8498026" cy="213271"/>
           </a:xfrm>
@@ -2205,7 +2465,7 @@
                 <a:ea typeface="Times New Roman" pitchFamily="34" charset="-122"/>
                 <a:cs typeface="Times New Roman" pitchFamily="34" charset="-120"/>
               </a:rPr>
-              <a:t>Teacher notes</a:t>
+              <a:t>Discussion (15 min)</a:t>
             </a:r>
             <a:endParaRPr lang="en-US" sz="1800" dirty="0"/>
           </a:p>
@@ -2219,8 +2479,8 @@
         </p:nvSpPr>
         <p:spPr>
           <a:xfrm>
-            <a:off x="406301" y="870942"/>
-            <a:ext cx="8498026" cy="639812"/>
+            <a:off x="634901" y="883593"/>
+            <a:ext cx="8102798" cy="975122"/>
           </a:xfrm>
           <a:prstGeom prst="rect">
             <a:avLst/>
@@ -2232,20 +2492,18 @@
           <a:bodyPr wrap="square" lIns="0" tIns="0" rIns="0" bIns="0" rtlCol="0" anchor="t"/>
           <a:lstStyle/>
           <a:p>
-            <a:pPr algn="l" indent="0" marL="0">
-              <a:lnSpc>
-                <a:spcPts val="1680"/>
-              </a:lnSpc>
-              <a:spcBef>
-                <a:spcPts val="300"/>
-              </a:spcBef>
-              <a:spcAft>
-                <a:spcPts val="300"/>
-              </a:spcAft>
-              <a:buNone/>
-            </a:pPr>
-            <a:r>
-              <a:rPr lang="en-US" sz="1200" dirty="0">
+            <a:pPr algn="l" marL="342900" indent="-342900">
+              <a:lnSpc>
+                <a:spcPts val="1620"/>
+              </a:lnSpc>
+              <a:spcAft>
+                <a:spcPts val="300"/>
+              </a:spcAft>
+              <a:buSzPct val="100000"/>
+              <a:buChar char="•"/>
+            </a:pPr>
+            <a:r>
+              <a:rPr lang="en-US" sz="1200" i="1" dirty="0">
                 <a:solidFill>
                   <a:srgbClr val="1A1A1A"/>
                 </a:solidFill>
@@ -2253,22 +2511,23 @@
                 <a:ea typeface="Georgia" pitchFamily="34" charset="-122"/>
                 <a:cs typeface="Georgia" pitchFamily="34" charset="-120"/>
               </a:rPr>
-              <a:t>– This is the most politically loaded session of the module. Honour the discomfort some students will feel. – The honest framing: </a:t>
-            </a:r>
-            <a:pPr algn="l" indent="0" marL="0">
-              <a:lnSpc>
-                <a:spcPts val="1680"/>
-              </a:lnSpc>
-              <a:spcBef>
-                <a:spcPts val="300"/>
-              </a:spcBef>
-              <a:spcAft>
-                <a:spcPts val="300"/>
-              </a:spcAft>
-              <a:buNone/>
-            </a:pPr>
-            <a:r>
-              <a:rPr lang="en-US" sz="1200" i="1" dirty="0">
+              <a:t>"What is YOUR reaction to Singleton's thesis? Does it diminish yoga, enrich your understanding, or feel like Western academic attack?"</a:t>
+            </a:r>
+            <a:endParaRPr lang="en-US" sz="1200" dirty="0"/>
+          </a:p>
+          <a:p>
+            <a:pPr algn="l" marL="342900" indent="-342900">
+              <a:lnSpc>
+                <a:spcPts val="1620"/>
+              </a:lnSpc>
+              <a:spcAft>
+                <a:spcPts val="300"/>
+              </a:spcAft>
+              <a:buSzPct val="100000"/>
+              <a:buChar char="•"/>
+            </a:pPr>
+            <a:r>
+              <a:rPr lang="en-US" sz="1200" dirty="0">
                 <a:solidFill>
                   <a:srgbClr val="1A1A1A"/>
                 </a:solidFill>
@@ -2276,7 +2535,51 @@
                 <a:ea typeface="Georgia" pitchFamily="34" charset="-122"/>
                 <a:cs typeface="Georgia" pitchFamily="34" charset="-120"/>
               </a:rPr>
-              <a:t>cultural achievements are not less valuable for being recent. Modern postural yoga is also a real Indian achievement; it's just a 20th-century one rather than an ancient one.</a:t>
+              <a:t>Hear from multiple students. Don't resolve the question.</a:t>
+            </a:r>
+            <a:endParaRPr lang="en-US" sz="1200" dirty="0"/>
+          </a:p>
+          <a:p>
+            <a:pPr algn="l" marL="342900" indent="-342900">
+              <a:lnSpc>
+                <a:spcPts val="1620"/>
+              </a:lnSpc>
+              <a:spcAft>
+                <a:spcPts val="300"/>
+              </a:spcAft>
+              <a:buSzPct val="100000"/>
+              <a:buChar char="•"/>
+            </a:pPr>
+            <a:r>
+              <a:rPr lang="en-US" sz="1200" dirty="0">
+                <a:solidFill>
+                  <a:srgbClr val="1A1A1A"/>
+                </a:solidFill>
+                <a:latin typeface="Georgia" pitchFamily="34" charset="0"/>
+                <a:ea typeface="Georgia" pitchFamily="34" charset="-122"/>
+                <a:cs typeface="Georgia" pitchFamily="34" charset="-120"/>
+              </a:rPr>
+              <a:t>Add: </a:t>
+            </a:r>
+            <a:pPr algn="l" indent="0" marL="0">
+              <a:lnSpc>
+                <a:spcPts val="1620"/>
+              </a:lnSpc>
+              <a:spcAft>
+                <a:spcPts val="300"/>
+              </a:spcAft>
+              <a:buNone/>
+            </a:pPr>
+            <a:r>
+              <a:rPr lang="en-US" sz="1200" i="1" dirty="0">
+                <a:solidFill>
+                  <a:srgbClr val="1A1A1A"/>
+                </a:solidFill>
+                <a:latin typeface="Georgia" pitchFamily="34" charset="0"/>
+                <a:ea typeface="Georgia" pitchFamily="34" charset="-122"/>
+                <a:cs typeface="Georgia" pitchFamily="34" charset="-120"/>
+              </a:rPr>
+              <a:t>"Singleton is a British scholar. Does that matter? Why or why not?"</a:t>
             </a:r>
             <a:endParaRPr lang="en-US" sz="1200" dirty="0"/>
           </a:p>
@@ -2434,7 +2737,7 @@
                 <a:ea typeface="Times New Roman" pitchFamily="34" charset="-122"/>
                 <a:cs typeface="Times New Roman" pitchFamily="34" charset="-120"/>
               </a:rPr>
-              <a:t>Citation(s) used</a:t>
+              <a:t>Practice (5 min)</a:t>
             </a:r>
             <a:endParaRPr lang="en-US" sz="1800" dirty="0"/>
           </a:p>
@@ -2449,7 +2752,7 @@
         <p:spPr>
           <a:xfrm>
             <a:off x="406301" y="870942"/>
-            <a:ext cx="8498026" cy="426541"/>
+            <a:ext cx="8498026" cy="213271"/>
           </a:xfrm>
           <a:prstGeom prst="rect">
             <a:avLst/>
@@ -2482,8 +2785,33 @@
                 <a:ea typeface="Georgia" pitchFamily="34" charset="-122"/>
                 <a:cs typeface="Georgia" pitchFamily="34" charset="-120"/>
               </a:rPr>
-              <a:t>– Singleton, M. (2010). </a:t>
-            </a:r>
+              <a:t>Brief Sūrya Namaskāra — 1 round. Same body, fresh awareness.</a:t>
+            </a:r>
+            <a:endParaRPr lang="en-US" sz="1200" dirty="0"/>
+          </a:p>
+        </p:txBody>
+      </p:sp>
+      <p:sp>
+        <p:nvSpPr>
+          <p:cNvPr id="5" name="Text 3"/>
+          <p:cNvSpPr/>
+          <p:nvPr/>
+        </p:nvSpPr>
+        <p:spPr>
+          <a:xfrm>
+            <a:off x="406301" y="4434929"/>
+            <a:ext cx="8498026" cy="213271"/>
+          </a:xfrm>
+          <a:prstGeom prst="rect">
+            <a:avLst/>
+          </a:prstGeom>
+          <a:noFill/>
+          <a:ln/>
+        </p:spPr>
+        <p:txBody>
+          <a:bodyPr wrap="square" lIns="0" tIns="0" rIns="0" bIns="0" rtlCol="0" anchor="t"/>
+          <a:lstStyle/>
+          <a:p>
             <a:pPr algn="l" indent="0" marL="0">
               <a:lnSpc>
                 <a:spcPts val="1680"/>
@@ -2497,7 +2825,7 @@
               <a:buNone/>
             </a:pPr>
             <a:r>
-              <a:rPr lang="en-US" sz="1200" i="1" dirty="0">
+              <a:rPr lang="en-US" sz="1200" dirty="0">
                 <a:solidFill>
                   <a:srgbClr val="1A1A1A"/>
                 </a:solidFill>
@@ -2505,19 +2833,152 @@
                 <a:ea typeface="Georgia" pitchFamily="34" charset="-122"/>
                 <a:cs typeface="Georgia" pitchFamily="34" charset="-120"/>
               </a:rPr>
-              <a:t>Yoga Body: The Origins of Modern Posture Practice.</a:t>
-            </a:r>
+              <a:t>Senior ·  · IKS Curriculum</a:t>
+            </a:r>
+            <a:endParaRPr lang="en-US" sz="1200" dirty="0"/>
+          </a:p>
+        </p:txBody>
+      </p:sp>
+    </p:spTree>
+  </p:cSld>
+  <p:clrMapOvr>
+    <a:masterClrMapping/>
+  </p:clrMapOvr>
+</p:sld>
+</file>
+
+<file path=ppt/slides/slide12.xml><?xml version="1.0" encoding="utf-8"?>
+<p:sld xmlns:a="http://schemas.openxmlformats.org/drawingml/2006/main" xmlns:r="http://schemas.openxmlformats.org/officeDocument/2006/relationships" xmlns:p="http://schemas.openxmlformats.org/presentationml/2006/main">
+  <p:cSld name="Slide 12">
+    <p:bg>
+      <p:bgPr>
+        <a:solidFill>
+          <a:srgbClr val="FAF7F2"/>
+        </a:solidFill>
+      </p:bgPr>
+    </p:bg>
+    <p:spTree>
+      <p:nvGrpSpPr>
+        <p:cNvPr id="1" name=""/>
+        <p:cNvGrpSpPr/>
+        <p:nvPr/>
+      </p:nvGrpSpPr>
+      <p:grpSpPr>
+        <a:xfrm>
+          <a:off x="0" y="0"/>
+          <a:ext cx="0" cy="0"/>
+          <a:chOff x="0" y="0"/>
+          <a:chExt cx="0" cy="0"/>
+        </a:xfrm>
+      </p:grpSpPr>
+      <p:sp>
+        <p:nvSpPr>
+          <p:cNvPr id="2" name="Text 0"/>
+          <p:cNvSpPr/>
+          <p:nvPr/>
+        </p:nvSpPr>
+        <p:spPr>
+          <a:xfrm>
+            <a:off x="0" y="0"/>
+            <a:ext cx="9144000" cy="101501"/>
+          </a:xfrm>
+          <a:prstGeom prst="rect">
+            <a:avLst/>
+          </a:prstGeom>
+          <a:solidFill>
+            <a:srgbClr val="5D1D2E"/>
+          </a:solidFill>
+          <a:ln/>
+        </p:spPr>
+        <p:txBody>
+          <a:bodyPr wrap="square" rtlCol="0" anchor="ctr"/>
+          <a:lstStyle/>
+          <a:p>
+            <a:pPr indent="0" marL="0">
+              <a:buNone/>
+            </a:pPr>
+            <a:endParaRPr lang="en-US" dirty="0"/>
+          </a:p>
+        </p:txBody>
+      </p:sp>
+      <p:sp>
+        <p:nvSpPr>
+          <p:cNvPr id="3" name="Text 1"/>
+          <p:cNvSpPr/>
+          <p:nvPr/>
+        </p:nvSpPr>
+        <p:spPr>
+          <a:xfrm>
+            <a:off x="406301" y="457051"/>
+            <a:ext cx="8498026" cy="274290"/>
+          </a:xfrm>
+          <a:prstGeom prst="rect">
+            <a:avLst/>
+          </a:prstGeom>
+          <a:noFill/>
+          <a:ln/>
+        </p:spPr>
+        <p:txBody>
+          <a:bodyPr wrap="square" lIns="0" tIns="0" rIns="0" bIns="0" rtlCol="0" anchor="t"/>
+          <a:lstStyle/>
+          <a:p>
             <a:pPr algn="l" indent="0" marL="0">
               <a:lnSpc>
-                <a:spcPts val="1680"/>
+                <a:spcPts val="2160"/>
               </a:lnSpc>
               <a:spcBef>
-                <a:spcPts val="300"/>
+                <a:spcPts val="600"/>
               </a:spcBef>
               <a:spcAft>
-                <a:spcPts val="300"/>
-              </a:spcAft>
-              <a:buNone/>
+                <a:spcPts val="800"/>
+              </a:spcAft>
+              <a:buNone/>
+            </a:pPr>
+            <a:r>
+              <a:rPr lang="en-US" sz="1800" b="1" dirty="0">
+                <a:solidFill>
+                  <a:srgbClr val="997929"/>
+                </a:solidFill>
+                <a:latin typeface="Times New Roman" pitchFamily="34" charset="0"/>
+                <a:ea typeface="Times New Roman" pitchFamily="34" charset="-122"/>
+                <a:cs typeface="Times New Roman" pitchFamily="34" charset="-120"/>
+              </a:rPr>
+              <a:t>Wrap-up (2 min)</a:t>
+            </a:r>
+            <a:endParaRPr lang="en-US" sz="1800" dirty="0"/>
+          </a:p>
+        </p:txBody>
+      </p:sp>
+      <p:sp>
+        <p:nvSpPr>
+          <p:cNvPr id="4" name="Text 2"/>
+          <p:cNvSpPr/>
+          <p:nvPr/>
+        </p:nvSpPr>
+        <p:spPr>
+          <a:xfrm>
+            <a:off x="634901" y="883593"/>
+            <a:ext cx="8102798" cy="281880"/>
+          </a:xfrm>
+          <a:prstGeom prst="rect">
+            <a:avLst/>
+          </a:prstGeom>
+          <a:noFill/>
+          <a:ln/>
+        </p:spPr>
+        <p:txBody>
+          <a:bodyPr wrap="square" lIns="0" tIns="0" rIns="0" bIns="0" rtlCol="0" anchor="t"/>
+          <a:lstStyle/>
+          <a:p>
+            <a:pPr algn="l" marL="342900" indent="-342900">
+              <a:lnSpc>
+                <a:spcPts val="1620"/>
+              </a:lnSpc>
+              <a:spcAft>
+                <a:spcPts val="300"/>
+              </a:spcAft>
+              <a:buSzPct val="100000"/>
+              <a:buChar char="•"/>
             </a:pPr>
             <a:r>
               <a:rPr lang="en-US" sz="1200" dirty="0">
@@ -2528,15 +2989,12 @@
                 <a:ea typeface="Georgia" pitchFamily="34" charset="-122"/>
                 <a:cs typeface="Georgia" pitchFamily="34" charset="-120"/>
               </a:rPr>
-              <a:t> Oxford University Press. – De Michelis, E. (2004). </a:t>
+              <a:t>Preview Day 8: </a:t>
             </a:r>
             <a:pPr algn="l" indent="0" marL="0">
               <a:lnSpc>
-                <a:spcPts val="1680"/>
-              </a:lnSpc>
-              <a:spcBef>
-                <a:spcPts val="300"/>
-              </a:spcBef>
+                <a:spcPts val="1620"/>
+              </a:lnSpc>
               <a:spcAft>
                 <a:spcPts val="300"/>
               </a:spcAft>
@@ -2551,15 +3009,816 @@
                 <a:ea typeface="Georgia" pitchFamily="34" charset="-122"/>
                 <a:cs typeface="Georgia" pitchFamily="34" charset="-120"/>
               </a:rPr>
+              <a:t>"Tomorrow — paper outlining."</a:t>
+            </a:r>
+            <a:endParaRPr lang="en-US" sz="1200" dirty="0"/>
+          </a:p>
+        </p:txBody>
+      </p:sp>
+      <p:sp>
+        <p:nvSpPr>
+          <p:cNvPr id="5" name="Text 3"/>
+          <p:cNvSpPr/>
+          <p:nvPr/>
+        </p:nvSpPr>
+        <p:spPr>
+          <a:xfrm>
+            <a:off x="406301" y="4434929"/>
+            <a:ext cx="8498026" cy="213271"/>
+          </a:xfrm>
+          <a:prstGeom prst="rect">
+            <a:avLst/>
+          </a:prstGeom>
+          <a:noFill/>
+          <a:ln/>
+        </p:spPr>
+        <p:txBody>
+          <a:bodyPr wrap="square" lIns="0" tIns="0" rIns="0" bIns="0" rtlCol="0" anchor="t"/>
+          <a:lstStyle/>
+          <a:p>
+            <a:pPr algn="l" indent="0" marL="0">
+              <a:lnSpc>
+                <a:spcPts val="1680"/>
+              </a:lnSpc>
+              <a:spcBef>
+                <a:spcPts val="300"/>
+              </a:spcBef>
+              <a:spcAft>
+                <a:spcPts val="300"/>
+              </a:spcAft>
+              <a:buNone/>
+            </a:pPr>
+            <a:r>
+              <a:rPr lang="en-US" sz="1200" dirty="0">
+                <a:solidFill>
+                  <a:srgbClr val="1A1A1A"/>
+                </a:solidFill>
+                <a:latin typeface="Georgia" pitchFamily="34" charset="0"/>
+                <a:ea typeface="Georgia" pitchFamily="34" charset="-122"/>
+                <a:cs typeface="Georgia" pitchFamily="34" charset="-120"/>
+              </a:rPr>
+              <a:t>Senior ·  · IKS Curriculum</a:t>
+            </a:r>
+            <a:endParaRPr lang="en-US" sz="1200" dirty="0"/>
+          </a:p>
+        </p:txBody>
+      </p:sp>
+    </p:spTree>
+  </p:cSld>
+  <p:clrMapOvr>
+    <a:masterClrMapping/>
+  </p:clrMapOvr>
+</p:sld>
+</file>
+
+<file path=ppt/slides/slide13.xml><?xml version="1.0" encoding="utf-8"?>
+<p:sld xmlns:a="http://schemas.openxmlformats.org/drawingml/2006/main" xmlns:r="http://schemas.openxmlformats.org/officeDocument/2006/relationships" xmlns:p="http://schemas.openxmlformats.org/presentationml/2006/main">
+  <p:cSld name="Slide 13">
+    <p:bg>
+      <p:bgPr>
+        <a:solidFill>
+          <a:srgbClr val="FAF7F2"/>
+        </a:solidFill>
+      </p:bgPr>
+    </p:bg>
+    <p:spTree>
+      <p:nvGrpSpPr>
+        <p:cNvPr id="1" name=""/>
+        <p:cNvGrpSpPr/>
+        <p:nvPr/>
+      </p:nvGrpSpPr>
+      <p:grpSpPr>
+        <a:xfrm>
+          <a:off x="0" y="0"/>
+          <a:ext cx="0" cy="0"/>
+          <a:chOff x="0" y="0"/>
+          <a:chExt cx="0" cy="0"/>
+        </a:xfrm>
+      </p:grpSpPr>
+      <p:sp>
+        <p:nvSpPr>
+          <p:cNvPr id="2" name="Text 0"/>
+          <p:cNvSpPr/>
+          <p:nvPr/>
+        </p:nvSpPr>
+        <p:spPr>
+          <a:xfrm>
+            <a:off x="0" y="0"/>
+            <a:ext cx="9144000" cy="101501"/>
+          </a:xfrm>
+          <a:prstGeom prst="rect">
+            <a:avLst/>
+          </a:prstGeom>
+          <a:solidFill>
+            <a:srgbClr val="5D1D2E"/>
+          </a:solidFill>
+          <a:ln/>
+        </p:spPr>
+        <p:txBody>
+          <a:bodyPr wrap="square" rtlCol="0" anchor="ctr"/>
+          <a:lstStyle/>
+          <a:p>
+            <a:pPr indent="0" marL="0">
+              <a:buNone/>
+            </a:pPr>
+            <a:endParaRPr lang="en-US" dirty="0"/>
+          </a:p>
+        </p:txBody>
+      </p:sp>
+      <p:sp>
+        <p:nvSpPr>
+          <p:cNvPr id="3" name="Text 1"/>
+          <p:cNvSpPr/>
+          <p:nvPr/>
+        </p:nvSpPr>
+        <p:spPr>
+          <a:xfrm>
+            <a:off x="406301" y="457051"/>
+            <a:ext cx="8498026" cy="274290"/>
+          </a:xfrm>
+          <a:prstGeom prst="rect">
+            <a:avLst/>
+          </a:prstGeom>
+          <a:noFill/>
+          <a:ln/>
+        </p:spPr>
+        <p:txBody>
+          <a:bodyPr wrap="square" lIns="0" tIns="0" rIns="0" bIns="0" rtlCol="0" anchor="t"/>
+          <a:lstStyle/>
+          <a:p>
+            <a:pPr algn="l" indent="0" marL="0">
+              <a:lnSpc>
+                <a:spcPts val="2160"/>
+              </a:lnSpc>
+              <a:spcBef>
+                <a:spcPts val="600"/>
+              </a:spcBef>
+              <a:spcAft>
+                <a:spcPts val="800"/>
+              </a:spcAft>
+              <a:buNone/>
+            </a:pPr>
+            <a:r>
+              <a:rPr lang="en-US" sz="1800" b="1" dirty="0">
+                <a:solidFill>
+                  <a:srgbClr val="997929"/>
+                </a:solidFill>
+                <a:latin typeface="Times New Roman" pitchFamily="34" charset="0"/>
+                <a:ea typeface="Times New Roman" pitchFamily="34" charset="-122"/>
+                <a:cs typeface="Times New Roman" pitchFamily="34" charset="-120"/>
+              </a:rPr>
+              <a:t>Differentiation</a:t>
+            </a:r>
+            <a:endParaRPr lang="en-US" sz="1800" dirty="0"/>
+          </a:p>
+        </p:txBody>
+      </p:sp>
+      <p:sp>
+        <p:nvSpPr>
+          <p:cNvPr id="4" name="Text 2"/>
+          <p:cNvSpPr/>
+          <p:nvPr/>
+        </p:nvSpPr>
+        <p:spPr>
+          <a:xfrm>
+            <a:off x="634901" y="883593"/>
+            <a:ext cx="8102798" cy="525661"/>
+          </a:xfrm>
+          <a:prstGeom prst="rect">
+            <a:avLst/>
+          </a:prstGeom>
+          <a:noFill/>
+          <a:ln/>
+        </p:spPr>
+        <p:txBody>
+          <a:bodyPr wrap="square" lIns="0" tIns="0" rIns="0" bIns="0" rtlCol="0" anchor="t"/>
+          <a:lstStyle/>
+          <a:p>
+            <a:pPr algn="l" marL="342900" indent="-342900">
+              <a:lnSpc>
+                <a:spcPts val="1620"/>
+              </a:lnSpc>
+              <a:spcAft>
+                <a:spcPts val="300"/>
+              </a:spcAft>
+              <a:buSzPct val="100000"/>
+              <a:buChar char="•"/>
+            </a:pPr>
+            <a:r>
+              <a:rPr lang="en-US" sz="1200" b="1" dirty="0">
+                <a:solidFill>
+                  <a:srgbClr val="1A1A1A"/>
+                </a:solidFill>
+                <a:latin typeface="Georgia" pitchFamily="34" charset="0"/>
+                <a:ea typeface="Georgia" pitchFamily="34" charset="-122"/>
+                <a:cs typeface="Georgia" pitchFamily="34" charset="-120"/>
+              </a:rPr>
+              <a:t>Tier up:</a:t>
+            </a:r>
+            <a:pPr algn="l" indent="0" marL="0">
+              <a:lnSpc>
+                <a:spcPts val="1620"/>
+              </a:lnSpc>
+              <a:spcAft>
+                <a:spcPts val="300"/>
+              </a:spcAft>
+              <a:buNone/>
+            </a:pPr>
+            <a:r>
+              <a:rPr lang="en-US" sz="1200" dirty="0">
+                <a:solidFill>
+                  <a:srgbClr val="1A1A1A"/>
+                </a:solidFill>
+                <a:latin typeface="Georgia" pitchFamily="34" charset="0"/>
+                <a:ea typeface="Georgia" pitchFamily="34" charset="-122"/>
+                <a:cs typeface="Georgia" pitchFamily="34" charset="-120"/>
+              </a:rPr>
+              <a:t> Read De Michelis (2004) too. Compare and contrast with Singleton.</a:t>
+            </a:r>
+            <a:endParaRPr lang="en-US" sz="1200" dirty="0"/>
+          </a:p>
+          <a:p>
+            <a:pPr algn="l" marL="342900" indent="-342900">
+              <a:lnSpc>
+                <a:spcPts val="1620"/>
+              </a:lnSpc>
+              <a:spcAft>
+                <a:spcPts val="300"/>
+              </a:spcAft>
+              <a:buSzPct val="100000"/>
+              <a:buChar char="•"/>
+            </a:pPr>
+            <a:r>
+              <a:rPr lang="en-US" sz="1200" b="1" dirty="0">
+                <a:solidFill>
+                  <a:srgbClr val="1A1A1A"/>
+                </a:solidFill>
+                <a:latin typeface="Georgia" pitchFamily="34" charset="0"/>
+                <a:ea typeface="Georgia" pitchFamily="34" charset="-122"/>
+                <a:cs typeface="Georgia" pitchFamily="34" charset="-120"/>
+              </a:rPr>
+              <a:t>Tier down:</a:t>
+            </a:r>
+            <a:pPr algn="l" indent="0" marL="0">
+              <a:lnSpc>
+                <a:spcPts val="1620"/>
+              </a:lnSpc>
+              <a:spcAft>
+                <a:spcPts val="300"/>
+              </a:spcAft>
+              <a:buNone/>
+            </a:pPr>
+            <a:r>
+              <a:rPr lang="en-US" sz="1200" dirty="0">
+                <a:solidFill>
+                  <a:srgbClr val="1A1A1A"/>
+                </a:solidFill>
+                <a:latin typeface="Georgia" pitchFamily="34" charset="0"/>
+                <a:ea typeface="Georgia" pitchFamily="34" charset="-122"/>
+                <a:cs typeface="Georgia" pitchFamily="34" charset="-120"/>
+              </a:rPr>
+              <a:t> Focus on Singleton's central thesis; the further reading can wait.</a:t>
+            </a:r>
+            <a:endParaRPr lang="en-US" sz="1200" dirty="0"/>
+          </a:p>
+        </p:txBody>
+      </p:sp>
+      <p:sp>
+        <p:nvSpPr>
+          <p:cNvPr id="5" name="Text 3"/>
+          <p:cNvSpPr/>
+          <p:nvPr/>
+        </p:nvSpPr>
+        <p:spPr>
+          <a:xfrm>
+            <a:off x="406301" y="4434929"/>
+            <a:ext cx="8498026" cy="213271"/>
+          </a:xfrm>
+          <a:prstGeom prst="rect">
+            <a:avLst/>
+          </a:prstGeom>
+          <a:noFill/>
+          <a:ln/>
+        </p:spPr>
+        <p:txBody>
+          <a:bodyPr wrap="square" lIns="0" tIns="0" rIns="0" bIns="0" rtlCol="0" anchor="t"/>
+          <a:lstStyle/>
+          <a:p>
+            <a:pPr algn="l" indent="0" marL="0">
+              <a:lnSpc>
+                <a:spcPts val="1680"/>
+              </a:lnSpc>
+              <a:spcBef>
+                <a:spcPts val="300"/>
+              </a:spcBef>
+              <a:spcAft>
+                <a:spcPts val="300"/>
+              </a:spcAft>
+              <a:buNone/>
+            </a:pPr>
+            <a:r>
+              <a:rPr lang="en-US" sz="1200" dirty="0">
+                <a:solidFill>
+                  <a:srgbClr val="1A1A1A"/>
+                </a:solidFill>
+                <a:latin typeface="Georgia" pitchFamily="34" charset="0"/>
+                <a:ea typeface="Georgia" pitchFamily="34" charset="-122"/>
+                <a:cs typeface="Georgia" pitchFamily="34" charset="-120"/>
+              </a:rPr>
+              <a:t>Senior ·  · IKS Curriculum</a:t>
+            </a:r>
+            <a:endParaRPr lang="en-US" sz="1200" dirty="0"/>
+          </a:p>
+        </p:txBody>
+      </p:sp>
+    </p:spTree>
+  </p:cSld>
+  <p:clrMapOvr>
+    <a:masterClrMapping/>
+  </p:clrMapOvr>
+</p:sld>
+</file>
+
+<file path=ppt/slides/slide14.xml><?xml version="1.0" encoding="utf-8"?>
+<p:sld xmlns:a="http://schemas.openxmlformats.org/drawingml/2006/main" xmlns:r="http://schemas.openxmlformats.org/officeDocument/2006/relationships" xmlns:p="http://schemas.openxmlformats.org/presentationml/2006/main">
+  <p:cSld name="Slide 14">
+    <p:bg>
+      <p:bgPr>
+        <a:solidFill>
+          <a:srgbClr val="FAF7F2"/>
+        </a:solidFill>
+      </p:bgPr>
+    </p:bg>
+    <p:spTree>
+      <p:nvGrpSpPr>
+        <p:cNvPr id="1" name=""/>
+        <p:cNvGrpSpPr/>
+        <p:nvPr/>
+      </p:nvGrpSpPr>
+      <p:grpSpPr>
+        <a:xfrm>
+          <a:off x="0" y="0"/>
+          <a:ext cx="0" cy="0"/>
+          <a:chOff x="0" y="0"/>
+          <a:chExt cx="0" cy="0"/>
+        </a:xfrm>
+      </p:grpSpPr>
+      <p:sp>
+        <p:nvSpPr>
+          <p:cNvPr id="2" name="Text 0"/>
+          <p:cNvSpPr/>
+          <p:nvPr/>
+        </p:nvSpPr>
+        <p:spPr>
+          <a:xfrm>
+            <a:off x="0" y="0"/>
+            <a:ext cx="9144000" cy="101501"/>
+          </a:xfrm>
+          <a:prstGeom prst="rect">
+            <a:avLst/>
+          </a:prstGeom>
+          <a:solidFill>
+            <a:srgbClr val="5D1D2E"/>
+          </a:solidFill>
+          <a:ln/>
+        </p:spPr>
+        <p:txBody>
+          <a:bodyPr wrap="square" rtlCol="0" anchor="ctr"/>
+          <a:lstStyle/>
+          <a:p>
+            <a:pPr indent="0" marL="0">
+              <a:buNone/>
+            </a:pPr>
+            <a:endParaRPr lang="en-US" dirty="0"/>
+          </a:p>
+        </p:txBody>
+      </p:sp>
+      <p:sp>
+        <p:nvSpPr>
+          <p:cNvPr id="3" name="Text 1"/>
+          <p:cNvSpPr/>
+          <p:nvPr/>
+        </p:nvSpPr>
+        <p:spPr>
+          <a:xfrm>
+            <a:off x="406301" y="457051"/>
+            <a:ext cx="8498026" cy="274290"/>
+          </a:xfrm>
+          <a:prstGeom prst="rect">
+            <a:avLst/>
+          </a:prstGeom>
+          <a:noFill/>
+          <a:ln/>
+        </p:spPr>
+        <p:txBody>
+          <a:bodyPr wrap="square" lIns="0" tIns="0" rIns="0" bIns="0" rtlCol="0" anchor="t"/>
+          <a:lstStyle/>
+          <a:p>
+            <a:pPr algn="l" indent="0" marL="0">
+              <a:lnSpc>
+                <a:spcPts val="2160"/>
+              </a:lnSpc>
+              <a:spcBef>
+                <a:spcPts val="600"/>
+              </a:spcBef>
+              <a:spcAft>
+                <a:spcPts val="800"/>
+              </a:spcAft>
+              <a:buNone/>
+            </a:pPr>
+            <a:r>
+              <a:rPr lang="en-US" sz="1800" b="1" dirty="0">
+                <a:solidFill>
+                  <a:srgbClr val="997929"/>
+                </a:solidFill>
+                <a:latin typeface="Times New Roman" pitchFamily="34" charset="0"/>
+                <a:ea typeface="Times New Roman" pitchFamily="34" charset="-122"/>
+                <a:cs typeface="Times New Roman" pitchFamily="34" charset="-120"/>
+              </a:rPr>
+              <a:t>Teacher notes</a:t>
+            </a:r>
+            <a:endParaRPr lang="en-US" sz="1800" dirty="0"/>
+          </a:p>
+        </p:txBody>
+      </p:sp>
+      <p:sp>
+        <p:nvSpPr>
+          <p:cNvPr id="4" name="Text 2"/>
+          <p:cNvSpPr/>
+          <p:nvPr/>
+        </p:nvSpPr>
+        <p:spPr>
+          <a:xfrm>
+            <a:off x="634901" y="883593"/>
+            <a:ext cx="8102798" cy="731341"/>
+          </a:xfrm>
+          <a:prstGeom prst="rect">
+            <a:avLst/>
+          </a:prstGeom>
+          <a:noFill/>
+          <a:ln/>
+        </p:spPr>
+        <p:txBody>
+          <a:bodyPr wrap="square" lIns="0" tIns="0" rIns="0" bIns="0" rtlCol="0" anchor="t"/>
+          <a:lstStyle/>
+          <a:p>
+            <a:pPr algn="l" marL="342900" indent="-342900">
+              <a:lnSpc>
+                <a:spcPts val="1620"/>
+              </a:lnSpc>
+              <a:spcAft>
+                <a:spcPts val="300"/>
+              </a:spcAft>
+              <a:buSzPct val="100000"/>
+              <a:buChar char="•"/>
+            </a:pPr>
+            <a:r>
+              <a:rPr lang="en-US" sz="1200" dirty="0">
+                <a:solidFill>
+                  <a:srgbClr val="1A1A1A"/>
+                </a:solidFill>
+                <a:latin typeface="Georgia" pitchFamily="34" charset="0"/>
+                <a:ea typeface="Georgia" pitchFamily="34" charset="-122"/>
+                <a:cs typeface="Georgia" pitchFamily="34" charset="-120"/>
+              </a:rPr>
+              <a:t>This is the most politically loaded session of the module. Honour the discomfort some students will feel.</a:t>
+            </a:r>
+            <a:endParaRPr lang="en-US" sz="1200" dirty="0"/>
+          </a:p>
+          <a:p>
+            <a:pPr algn="l" marL="342900" indent="-342900">
+              <a:lnSpc>
+                <a:spcPts val="1620"/>
+              </a:lnSpc>
+              <a:spcAft>
+                <a:spcPts val="300"/>
+              </a:spcAft>
+              <a:buSzPct val="100000"/>
+              <a:buChar char="•"/>
+            </a:pPr>
+            <a:r>
+              <a:rPr lang="en-US" sz="1200" dirty="0">
+                <a:solidFill>
+                  <a:srgbClr val="1A1A1A"/>
+                </a:solidFill>
+                <a:latin typeface="Georgia" pitchFamily="34" charset="0"/>
+                <a:ea typeface="Georgia" pitchFamily="34" charset="-122"/>
+                <a:cs typeface="Georgia" pitchFamily="34" charset="-120"/>
+              </a:rPr>
+              <a:t>The honest framing: </a:t>
+            </a:r>
+            <a:pPr algn="l" indent="0" marL="0">
+              <a:lnSpc>
+                <a:spcPts val="1620"/>
+              </a:lnSpc>
+              <a:spcAft>
+                <a:spcPts val="300"/>
+              </a:spcAft>
+              <a:buNone/>
+            </a:pPr>
+            <a:r>
+              <a:rPr lang="en-US" sz="1200" i="1" dirty="0">
+                <a:solidFill>
+                  <a:srgbClr val="1A1A1A"/>
+                </a:solidFill>
+                <a:latin typeface="Georgia" pitchFamily="34" charset="0"/>
+                <a:ea typeface="Georgia" pitchFamily="34" charset="-122"/>
+                <a:cs typeface="Georgia" pitchFamily="34" charset="-120"/>
+              </a:rPr>
+              <a:t>cultural achievements are not less valuable for being recent. Modern postural yoga is also a real Indian achievement; it's just a 20th-century one rather than an ancient one.</a:t>
+            </a:r>
+            <a:endParaRPr lang="en-US" sz="1200" dirty="0"/>
+          </a:p>
+        </p:txBody>
+      </p:sp>
+      <p:sp>
+        <p:nvSpPr>
+          <p:cNvPr id="5" name="Text 3"/>
+          <p:cNvSpPr/>
+          <p:nvPr/>
+        </p:nvSpPr>
+        <p:spPr>
+          <a:xfrm>
+            <a:off x="406301" y="4434929"/>
+            <a:ext cx="8498026" cy="213271"/>
+          </a:xfrm>
+          <a:prstGeom prst="rect">
+            <a:avLst/>
+          </a:prstGeom>
+          <a:noFill/>
+          <a:ln/>
+        </p:spPr>
+        <p:txBody>
+          <a:bodyPr wrap="square" lIns="0" tIns="0" rIns="0" bIns="0" rtlCol="0" anchor="t"/>
+          <a:lstStyle/>
+          <a:p>
+            <a:pPr algn="l" indent="0" marL="0">
+              <a:lnSpc>
+                <a:spcPts val="1680"/>
+              </a:lnSpc>
+              <a:spcBef>
+                <a:spcPts val="300"/>
+              </a:spcBef>
+              <a:spcAft>
+                <a:spcPts val="300"/>
+              </a:spcAft>
+              <a:buNone/>
+            </a:pPr>
+            <a:r>
+              <a:rPr lang="en-US" sz="1200" dirty="0">
+                <a:solidFill>
+                  <a:srgbClr val="1A1A1A"/>
+                </a:solidFill>
+                <a:latin typeface="Georgia" pitchFamily="34" charset="0"/>
+                <a:ea typeface="Georgia" pitchFamily="34" charset="-122"/>
+                <a:cs typeface="Georgia" pitchFamily="34" charset="-120"/>
+              </a:rPr>
+              <a:t>Senior ·  · IKS Curriculum</a:t>
+            </a:r>
+            <a:endParaRPr lang="en-US" sz="1200" dirty="0"/>
+          </a:p>
+        </p:txBody>
+      </p:sp>
+    </p:spTree>
+  </p:cSld>
+  <p:clrMapOvr>
+    <a:masterClrMapping/>
+  </p:clrMapOvr>
+</p:sld>
+</file>
+
+<file path=ppt/slides/slide15.xml><?xml version="1.0" encoding="utf-8"?>
+<p:sld xmlns:a="http://schemas.openxmlformats.org/drawingml/2006/main" xmlns:r="http://schemas.openxmlformats.org/officeDocument/2006/relationships" xmlns:p="http://schemas.openxmlformats.org/presentationml/2006/main">
+  <p:cSld name="Slide 15">
+    <p:bg>
+      <p:bgPr>
+        <a:solidFill>
+          <a:srgbClr val="FAF7F2"/>
+        </a:solidFill>
+      </p:bgPr>
+    </p:bg>
+    <p:spTree>
+      <p:nvGrpSpPr>
+        <p:cNvPr id="1" name=""/>
+        <p:cNvGrpSpPr/>
+        <p:nvPr/>
+      </p:nvGrpSpPr>
+      <p:grpSpPr>
+        <a:xfrm>
+          <a:off x="0" y="0"/>
+          <a:ext cx="0" cy="0"/>
+          <a:chOff x="0" y="0"/>
+          <a:chExt cx="0" cy="0"/>
+        </a:xfrm>
+      </p:grpSpPr>
+      <p:sp>
+        <p:nvSpPr>
+          <p:cNvPr id="2" name="Text 0"/>
+          <p:cNvSpPr/>
+          <p:nvPr/>
+        </p:nvSpPr>
+        <p:spPr>
+          <a:xfrm>
+            <a:off x="0" y="0"/>
+            <a:ext cx="9144000" cy="101501"/>
+          </a:xfrm>
+          <a:prstGeom prst="rect">
+            <a:avLst/>
+          </a:prstGeom>
+          <a:solidFill>
+            <a:srgbClr val="5D1D2E"/>
+          </a:solidFill>
+          <a:ln/>
+        </p:spPr>
+        <p:txBody>
+          <a:bodyPr wrap="square" rtlCol="0" anchor="ctr"/>
+          <a:lstStyle/>
+          <a:p>
+            <a:pPr indent="0" marL="0">
+              <a:buNone/>
+            </a:pPr>
+            <a:endParaRPr lang="en-US" dirty="0"/>
+          </a:p>
+        </p:txBody>
+      </p:sp>
+      <p:sp>
+        <p:nvSpPr>
+          <p:cNvPr id="3" name="Text 1"/>
+          <p:cNvSpPr/>
+          <p:nvPr/>
+        </p:nvSpPr>
+        <p:spPr>
+          <a:xfrm>
+            <a:off x="406301" y="457051"/>
+            <a:ext cx="8498026" cy="274290"/>
+          </a:xfrm>
+          <a:prstGeom prst="rect">
+            <a:avLst/>
+          </a:prstGeom>
+          <a:noFill/>
+          <a:ln/>
+        </p:spPr>
+        <p:txBody>
+          <a:bodyPr wrap="square" lIns="0" tIns="0" rIns="0" bIns="0" rtlCol="0" anchor="t"/>
+          <a:lstStyle/>
+          <a:p>
+            <a:pPr algn="l" indent="0" marL="0">
+              <a:lnSpc>
+                <a:spcPts val="2160"/>
+              </a:lnSpc>
+              <a:spcBef>
+                <a:spcPts val="600"/>
+              </a:spcBef>
+              <a:spcAft>
+                <a:spcPts val="800"/>
+              </a:spcAft>
+              <a:buNone/>
+            </a:pPr>
+            <a:r>
+              <a:rPr lang="en-US" sz="1800" b="1" dirty="0">
+                <a:solidFill>
+                  <a:srgbClr val="997929"/>
+                </a:solidFill>
+                <a:latin typeface="Times New Roman" pitchFamily="34" charset="0"/>
+                <a:ea typeface="Times New Roman" pitchFamily="34" charset="-122"/>
+                <a:cs typeface="Times New Roman" pitchFamily="34" charset="-120"/>
+              </a:rPr>
+              <a:t>Citation(s) used</a:t>
+            </a:r>
+            <a:endParaRPr lang="en-US" sz="1800" dirty="0"/>
+          </a:p>
+        </p:txBody>
+      </p:sp>
+      <p:sp>
+        <p:nvSpPr>
+          <p:cNvPr id="4" name="Text 2"/>
+          <p:cNvSpPr/>
+          <p:nvPr/>
+        </p:nvSpPr>
+        <p:spPr>
+          <a:xfrm>
+            <a:off x="634901" y="883593"/>
+            <a:ext cx="8102798" cy="525661"/>
+          </a:xfrm>
+          <a:prstGeom prst="rect">
+            <a:avLst/>
+          </a:prstGeom>
+          <a:noFill/>
+          <a:ln/>
+        </p:spPr>
+        <p:txBody>
+          <a:bodyPr wrap="square" lIns="0" tIns="0" rIns="0" bIns="0" rtlCol="0" anchor="t"/>
+          <a:lstStyle/>
+          <a:p>
+            <a:pPr algn="l" marL="342900" indent="-342900">
+              <a:lnSpc>
+                <a:spcPts val="1620"/>
+              </a:lnSpc>
+              <a:spcAft>
+                <a:spcPts val="300"/>
+              </a:spcAft>
+              <a:buSzPct val="100000"/>
+              <a:buChar char="•"/>
+            </a:pPr>
+            <a:r>
+              <a:rPr lang="en-US" sz="1200" dirty="0">
+                <a:solidFill>
+                  <a:srgbClr val="1A1A1A"/>
+                </a:solidFill>
+                <a:latin typeface="Georgia" pitchFamily="34" charset="0"/>
+                <a:ea typeface="Georgia" pitchFamily="34" charset="-122"/>
+                <a:cs typeface="Georgia" pitchFamily="34" charset="-120"/>
+              </a:rPr>
+              <a:t>Singleton, M. (2010). </a:t>
+            </a:r>
+            <a:pPr algn="l" indent="0" marL="0">
+              <a:lnSpc>
+                <a:spcPts val="1620"/>
+              </a:lnSpc>
+              <a:spcAft>
+                <a:spcPts val="300"/>
+              </a:spcAft>
+              <a:buNone/>
+            </a:pPr>
+            <a:r>
+              <a:rPr lang="en-US" sz="1200" i="1" dirty="0">
+                <a:solidFill>
+                  <a:srgbClr val="1A1A1A"/>
+                </a:solidFill>
+                <a:latin typeface="Georgia" pitchFamily="34" charset="0"/>
+                <a:ea typeface="Georgia" pitchFamily="34" charset="-122"/>
+                <a:cs typeface="Georgia" pitchFamily="34" charset="-120"/>
+              </a:rPr>
+              <a:t>Yoga Body: The Origins of Modern Posture Practice.</a:t>
+            </a:r>
+            <a:pPr algn="l" indent="0" marL="0">
+              <a:lnSpc>
+                <a:spcPts val="1620"/>
+              </a:lnSpc>
+              <a:spcAft>
+                <a:spcPts val="300"/>
+              </a:spcAft>
+              <a:buNone/>
+            </a:pPr>
+            <a:r>
+              <a:rPr lang="en-US" sz="1200" dirty="0">
+                <a:solidFill>
+                  <a:srgbClr val="1A1A1A"/>
+                </a:solidFill>
+                <a:latin typeface="Georgia" pitchFamily="34" charset="0"/>
+                <a:ea typeface="Georgia" pitchFamily="34" charset="-122"/>
+                <a:cs typeface="Georgia" pitchFamily="34" charset="-120"/>
+              </a:rPr>
+              <a:t> Oxford University Press.</a:t>
+            </a:r>
+            <a:endParaRPr lang="en-US" sz="1200" dirty="0"/>
+          </a:p>
+          <a:p>
+            <a:pPr algn="l" marL="342900" indent="-342900">
+              <a:lnSpc>
+                <a:spcPts val="1620"/>
+              </a:lnSpc>
+              <a:spcAft>
+                <a:spcPts val="300"/>
+              </a:spcAft>
+              <a:buSzPct val="100000"/>
+              <a:buChar char="•"/>
+            </a:pPr>
+            <a:r>
+              <a:rPr lang="en-US" sz="1200" dirty="0">
+                <a:solidFill>
+                  <a:srgbClr val="1A1A1A"/>
+                </a:solidFill>
+                <a:latin typeface="Georgia" pitchFamily="34" charset="0"/>
+                <a:ea typeface="Georgia" pitchFamily="34" charset="-122"/>
+                <a:cs typeface="Georgia" pitchFamily="34" charset="-120"/>
+              </a:rPr>
+              <a:t>De Michelis, E. (2004). </a:t>
+            </a:r>
+            <a:pPr algn="l" indent="0" marL="0">
+              <a:lnSpc>
+                <a:spcPts val="1620"/>
+              </a:lnSpc>
+              <a:spcAft>
+                <a:spcPts val="300"/>
+              </a:spcAft>
+              <a:buNone/>
+            </a:pPr>
+            <a:r>
+              <a:rPr lang="en-US" sz="1200" i="1" dirty="0">
+                <a:solidFill>
+                  <a:srgbClr val="1A1A1A"/>
+                </a:solidFill>
+                <a:latin typeface="Georgia" pitchFamily="34" charset="0"/>
+                <a:ea typeface="Georgia" pitchFamily="34" charset="-122"/>
+                <a:cs typeface="Georgia" pitchFamily="34" charset="-120"/>
+              </a:rPr>
               <a:t>A History of Modern Yoga.</a:t>
             </a:r>
             <a:pPr algn="l" indent="0" marL="0">
               <a:lnSpc>
-                <a:spcPts val="1680"/>
-              </a:lnSpc>
-              <a:spcBef>
-                <a:spcPts val="300"/>
-              </a:spcBef>
+                <a:spcPts val="1620"/>
+              </a:lnSpc>
               <a:spcAft>
                 <a:spcPts val="300"/>
               </a:spcAft>
@@ -2732,7 +3991,7 @@
                 <a:ea typeface="Times New Roman" pitchFamily="34" charset="-122"/>
                 <a:cs typeface="Times New Roman" pitchFamily="34" charset="-120"/>
               </a:rPr>
-              <a:t>Materials</a:t>
+              <a:t>Learning objective</a:t>
             </a:r>
             <a:endParaRPr lang="en-US" sz="1800" dirty="0"/>
           </a:p>
@@ -2747,7 +4006,7 @@
         <p:spPr>
           <a:xfrm>
             <a:off x="406301" y="870942"/>
-            <a:ext cx="8498026" cy="213271"/>
+            <a:ext cx="8498026" cy="426541"/>
           </a:xfrm>
           <a:prstGeom prst="rect">
             <a:avLst/>
@@ -2780,53 +4039,7 @@
                 <a:ea typeface="Georgia" pitchFamily="34" charset="-122"/>
                 <a:cs typeface="Georgia" pitchFamily="34" charset="-120"/>
               </a:rPr>
-              <a:t>– Mats – Printed extract from Singleton (2010), </a:t>
-            </a:r>
-            <a:pPr algn="l" indent="0" marL="0">
-              <a:lnSpc>
-                <a:spcPts val="1680"/>
-              </a:lnSpc>
-              <a:spcBef>
-                <a:spcPts val="300"/>
-              </a:spcBef>
-              <a:spcAft>
-                <a:spcPts val="300"/>
-              </a:spcAft>
-              <a:buNone/>
-            </a:pPr>
-            <a:r>
-              <a:rPr lang="en-US" sz="1200" i="1" dirty="0">
-                <a:solidFill>
-                  <a:srgbClr val="1A1A1A"/>
-                </a:solidFill>
-                <a:latin typeface="Georgia" pitchFamily="34" charset="0"/>
-                <a:ea typeface="Georgia" pitchFamily="34" charset="-122"/>
-                <a:cs typeface="Georgia" pitchFamily="34" charset="-120"/>
-              </a:rPr>
-              <a:t>Yoga Body</a:t>
-            </a:r>
-            <a:pPr algn="l" indent="0" marL="0">
-              <a:lnSpc>
-                <a:spcPts val="1680"/>
-              </a:lnSpc>
-              <a:spcBef>
-                <a:spcPts val="300"/>
-              </a:spcBef>
-              <a:spcAft>
-                <a:spcPts val="300"/>
-              </a:spcAft>
-              <a:buNone/>
-            </a:pPr>
-            <a:r>
-              <a:rPr lang="en-US" sz="1200" dirty="0">
-                <a:solidFill>
-                  <a:srgbClr val="1A1A1A"/>
-                </a:solidFill>
-                <a:latin typeface="Georgia" pitchFamily="34" charset="0"/>
-                <a:ea typeface="Georgia" pitchFamily="34" charset="-122"/>
-                <a:cs typeface="Georgia" pitchFamily="34" charset="-120"/>
-              </a:rPr>
-              <a:t> — Introduction + Ch. 1 (or teacher synopsis) – Whiteboard</a:t>
+              <a:t>Students engage Singleton's (2010) thesis that modern postural yoga is largely a 20th-century synthesis, articulate one strength and one weakness of that thesis, and discuss what is at stake.</a:t>
             </a:r>
             <a:endParaRPr lang="en-US" sz="1200" dirty="0"/>
           </a:p>
@@ -2984,7 +4197,7 @@
                 <a:ea typeface="Times New Roman" pitchFamily="34" charset="-122"/>
                 <a:cs typeface="Times New Roman" pitchFamily="34" charset="-120"/>
               </a:rPr>
-              <a:t>Flow</a:t>
+              <a:t>Materials</a:t>
             </a:r>
             <a:endParaRPr lang="en-US" sz="1800" dirty="0"/>
           </a:p>
@@ -2993,6 +4206,140 @@
       <p:sp>
         <p:nvSpPr>
           <p:cNvPr id="4" name="Text 2"/>
+          <p:cNvSpPr/>
+          <p:nvPr/>
+        </p:nvSpPr>
+        <p:spPr>
+          <a:xfrm>
+            <a:off x="634901" y="883593"/>
+            <a:ext cx="8102798" cy="769441"/>
+          </a:xfrm>
+          <a:prstGeom prst="rect">
+            <a:avLst/>
+          </a:prstGeom>
+          <a:noFill/>
+          <a:ln/>
+        </p:spPr>
+        <p:txBody>
+          <a:bodyPr wrap="square" lIns="0" tIns="0" rIns="0" bIns="0" rtlCol="0" anchor="t"/>
+          <a:lstStyle/>
+          <a:p>
+            <a:pPr algn="l" marL="342900" indent="-342900">
+              <a:lnSpc>
+                <a:spcPts val="1620"/>
+              </a:lnSpc>
+              <a:spcAft>
+                <a:spcPts val="300"/>
+              </a:spcAft>
+              <a:buSzPct val="100000"/>
+              <a:buChar char="•"/>
+            </a:pPr>
+            <a:r>
+              <a:rPr lang="en-US" sz="1200" dirty="0">
+                <a:solidFill>
+                  <a:srgbClr val="1A1A1A"/>
+                </a:solidFill>
+                <a:latin typeface="Georgia" pitchFamily="34" charset="0"/>
+                <a:ea typeface="Georgia" pitchFamily="34" charset="-122"/>
+                <a:cs typeface="Georgia" pitchFamily="34" charset="-120"/>
+              </a:rPr>
+              <a:t>Mats</a:t>
+            </a:r>
+            <a:endParaRPr lang="en-US" sz="1200" dirty="0"/>
+          </a:p>
+          <a:p>
+            <a:pPr algn="l" marL="342900" indent="-342900">
+              <a:lnSpc>
+                <a:spcPts val="1620"/>
+              </a:lnSpc>
+              <a:spcAft>
+                <a:spcPts val="300"/>
+              </a:spcAft>
+              <a:buSzPct val="100000"/>
+              <a:buChar char="•"/>
+            </a:pPr>
+            <a:r>
+              <a:rPr lang="en-US" sz="1200" dirty="0">
+                <a:solidFill>
+                  <a:srgbClr val="1A1A1A"/>
+                </a:solidFill>
+                <a:latin typeface="Georgia" pitchFamily="34" charset="0"/>
+                <a:ea typeface="Georgia" pitchFamily="34" charset="-122"/>
+                <a:cs typeface="Georgia" pitchFamily="34" charset="-120"/>
+              </a:rPr>
+              <a:t>Printed extract from Singleton (2010), </a:t>
+            </a:r>
+            <a:pPr algn="l" indent="0" marL="0">
+              <a:lnSpc>
+                <a:spcPts val="1620"/>
+              </a:lnSpc>
+              <a:spcAft>
+                <a:spcPts val="300"/>
+              </a:spcAft>
+              <a:buNone/>
+            </a:pPr>
+            <a:r>
+              <a:rPr lang="en-US" sz="1200" i="1" dirty="0">
+                <a:solidFill>
+                  <a:srgbClr val="1A1A1A"/>
+                </a:solidFill>
+                <a:latin typeface="Georgia" pitchFamily="34" charset="0"/>
+                <a:ea typeface="Georgia" pitchFamily="34" charset="-122"/>
+                <a:cs typeface="Georgia" pitchFamily="34" charset="-120"/>
+              </a:rPr>
+              <a:t>Yoga Body</a:t>
+            </a:r>
+            <a:pPr algn="l" indent="0" marL="0">
+              <a:lnSpc>
+                <a:spcPts val="1620"/>
+              </a:lnSpc>
+              <a:spcAft>
+                <a:spcPts val="300"/>
+              </a:spcAft>
+              <a:buNone/>
+            </a:pPr>
+            <a:r>
+              <a:rPr lang="en-US" sz="1200" dirty="0">
+                <a:solidFill>
+                  <a:srgbClr val="1A1A1A"/>
+                </a:solidFill>
+                <a:latin typeface="Georgia" pitchFamily="34" charset="0"/>
+                <a:ea typeface="Georgia" pitchFamily="34" charset="-122"/>
+                <a:cs typeface="Georgia" pitchFamily="34" charset="-120"/>
+              </a:rPr>
+              <a:t> — Introduction + Ch. 1 (or teacher synopsis)</a:t>
+            </a:r>
+            <a:endParaRPr lang="en-US" sz="1200" dirty="0"/>
+          </a:p>
+          <a:p>
+            <a:pPr algn="l" marL="342900" indent="-342900">
+              <a:lnSpc>
+                <a:spcPts val="1620"/>
+              </a:lnSpc>
+              <a:spcAft>
+                <a:spcPts val="300"/>
+              </a:spcAft>
+              <a:buSzPct val="100000"/>
+              <a:buChar char="•"/>
+            </a:pPr>
+            <a:r>
+              <a:rPr lang="en-US" sz="1200" dirty="0">
+                <a:solidFill>
+                  <a:srgbClr val="1A1A1A"/>
+                </a:solidFill>
+                <a:latin typeface="Georgia" pitchFamily="34" charset="0"/>
+                <a:ea typeface="Georgia" pitchFamily="34" charset="-122"/>
+                <a:cs typeface="Georgia" pitchFamily="34" charset="-120"/>
+              </a:rPr>
+              <a:t>Whiteboard</a:t>
+            </a:r>
+            <a:endParaRPr lang="en-US" sz="1200" dirty="0"/>
+          </a:p>
+        </p:txBody>
+      </p:sp>
+      <p:sp>
+        <p:nvSpPr>
+          <p:cNvPr id="5" name="Text 3"/>
           <p:cNvSpPr/>
           <p:nvPr/>
         </p:nvSpPr>
@@ -3142,7 +4489,7 @@
                 <a:ea typeface="Times New Roman" pitchFamily="34" charset="-122"/>
                 <a:cs typeface="Times New Roman" pitchFamily="34" charset="-120"/>
               </a:rPr>
-              <a:t>Settle (3 min)</a:t>
+              <a:t>Flow</a:t>
             </a:r>
             <a:endParaRPr lang="en-US" sz="1800" dirty="0"/>
           </a:p>
@@ -3300,7 +4647,7 @@
                 <a:ea typeface="Times New Roman" pitchFamily="34" charset="-122"/>
                 <a:cs typeface="Times New Roman" pitchFamily="34" charset="-120"/>
               </a:rPr>
-              <a:t>Core (20 min)</a:t>
+              <a:t>Settle (3 min)</a:t>
             </a:r>
             <a:endParaRPr lang="en-US" sz="1800" dirty="0"/>
           </a:p>
@@ -3314,472 +4661,7 @@
         </p:nvSpPr>
         <p:spPr>
           <a:xfrm>
-            <a:off x="634901" y="883593"/>
-            <a:ext cx="8102798" cy="281880"/>
-          </a:xfrm>
-          <a:prstGeom prst="rect">
-            <a:avLst/>
-          </a:prstGeom>
-          <a:noFill/>
-          <a:ln/>
-        </p:spPr>
-        <p:txBody>
-          <a:bodyPr wrap="square" lIns="0" tIns="0" rIns="0" bIns="0" rtlCol="0" anchor="t"/>
-          <a:lstStyle/>
-          <a:p>
-            <a:pPr algn="l" marL="342900" indent="-342900">
-              <a:lnSpc>
-                <a:spcPts val="1620"/>
-              </a:lnSpc>
-              <a:spcAft>
-                <a:spcPts val="300"/>
-              </a:spcAft>
-              <a:buSzPct val="100000"/>
-              <a:buChar char="•"/>
-            </a:pPr>
-            <a:r>
-              <a:rPr lang="en-US" sz="1200" b="1" dirty="0">
-                <a:solidFill>
-                  <a:srgbClr val="1A1A1A"/>
-                </a:solidFill>
-                <a:latin typeface="Georgia" pitchFamily="34" charset="0"/>
-                <a:ea typeface="Georgia" pitchFamily="34" charset="-122"/>
-                <a:cs typeface="Georgia" pitchFamily="34" charset="-120"/>
-              </a:rPr>
-              <a:t>Singleton's thesis</a:t>
-            </a:r>
-            <a:pPr algn="l" indent="0" marL="0">
-              <a:lnSpc>
-                <a:spcPts val="1620"/>
-              </a:lnSpc>
-              <a:spcAft>
-                <a:spcPts val="300"/>
-              </a:spcAft>
-              <a:buNone/>
-            </a:pPr>
-            <a:r>
-              <a:rPr lang="en-US" sz="1200" dirty="0">
-                <a:solidFill>
-                  <a:srgbClr val="1A1A1A"/>
-                </a:solidFill>
-                <a:latin typeface="Georgia" pitchFamily="34" charset="0"/>
-                <a:ea typeface="Georgia" pitchFamily="34" charset="-122"/>
-                <a:cs typeface="Georgia" pitchFamily="34" charset="-120"/>
-              </a:rPr>
-              <a:t> (write on board):</a:t>
-            </a:r>
-            <a:endParaRPr lang="en-US" sz="1200" dirty="0"/>
-          </a:p>
-        </p:txBody>
-      </p:sp>
-      <p:sp>
-        <p:nvSpPr>
-          <p:cNvPr id="5" name="Text 3"/>
-          <p:cNvSpPr/>
-          <p:nvPr/>
-        </p:nvSpPr>
-        <p:spPr>
-          <a:xfrm>
-            <a:off x="406301" y="1254323"/>
-            <a:ext cx="8498026" cy="639812"/>
-          </a:xfrm>
-          <a:prstGeom prst="rect">
-            <a:avLst/>
-          </a:prstGeom>
-          <a:noFill/>
-          <a:ln/>
-        </p:spPr>
-        <p:txBody>
-          <a:bodyPr wrap="square" lIns="0" tIns="0" rIns="0" bIns="0" rtlCol="0" anchor="t"/>
-          <a:lstStyle/>
-          <a:p>
-            <a:pPr algn="l" indent="0" marL="0">
-              <a:lnSpc>
-                <a:spcPts val="1680"/>
-              </a:lnSpc>
-              <a:spcBef>
-                <a:spcPts val="300"/>
-              </a:spcBef>
-              <a:spcAft>
-                <a:spcPts val="300"/>
-              </a:spcAft>
-              <a:buNone/>
-            </a:pPr>
-            <a:r>
-              <a:rPr lang="en-US" sz="1200" dirty="0">
-                <a:solidFill>
-                  <a:srgbClr val="1A1A1A"/>
-                </a:solidFill>
-                <a:latin typeface="Georgia" pitchFamily="34" charset="0"/>
-                <a:ea typeface="Georgia" pitchFamily="34" charset="-122"/>
-                <a:cs typeface="Georgia" pitchFamily="34" charset="-120"/>
-              </a:rPr>
-              <a:t>&gt; Modern postural yoga, as taught in studios and schools worldwide today, is largely a 20th-century synthesis — drawing on classical Indian texts AND on European physical-culture movements that arrived in India during the colonial period (gymnastics, Swedish drill, bodybuilding, etc.).</a:t>
-            </a:r>
-            <a:endParaRPr lang="en-US" sz="1200" dirty="0"/>
-          </a:p>
-        </p:txBody>
-      </p:sp>
-      <p:sp>
-        <p:nvSpPr>
-          <p:cNvPr id="6" name="Text 4"/>
-          <p:cNvSpPr/>
-          <p:nvPr/>
-        </p:nvSpPr>
-        <p:spPr>
-          <a:xfrm>
-            <a:off x="634901" y="1982986"/>
-            <a:ext cx="8102798" cy="281880"/>
-          </a:xfrm>
-          <a:prstGeom prst="rect">
-            <a:avLst/>
-          </a:prstGeom>
-          <a:noFill/>
-          <a:ln/>
-        </p:spPr>
-        <p:txBody>
-          <a:bodyPr wrap="square" lIns="0" tIns="0" rIns="0" bIns="0" rtlCol="0" anchor="t"/>
-          <a:lstStyle/>
-          <a:p>
-            <a:pPr algn="l" marL="342900" indent="-342900">
-              <a:lnSpc>
-                <a:spcPts val="1620"/>
-              </a:lnSpc>
-              <a:spcAft>
-                <a:spcPts val="300"/>
-              </a:spcAft>
-              <a:buSzPct val="100000"/>
-              <a:buChar char="•"/>
-            </a:pPr>
-            <a:r>
-              <a:rPr lang="en-US" sz="1200" b="1" dirty="0">
-                <a:solidFill>
-                  <a:srgbClr val="1A1A1A"/>
-                </a:solidFill>
-                <a:latin typeface="Georgia" pitchFamily="34" charset="0"/>
-                <a:ea typeface="Georgia" pitchFamily="34" charset="-122"/>
-                <a:cs typeface="Georgia" pitchFamily="34" charset="-120"/>
-              </a:rPr>
-              <a:t>Specific examples Singleton gives:</a:t>
-            </a:r>
-            <a:endParaRPr lang="en-US" sz="1200" dirty="0"/>
-          </a:p>
-        </p:txBody>
-      </p:sp>
-      <p:sp>
-        <p:nvSpPr>
-          <p:cNvPr id="7" name="Text 5"/>
-          <p:cNvSpPr/>
-          <p:nvPr/>
-        </p:nvSpPr>
-        <p:spPr>
-          <a:xfrm>
-            <a:off x="406301" y="2353717"/>
-            <a:ext cx="8498026" cy="853083"/>
-          </a:xfrm>
-          <a:prstGeom prst="rect">
-            <a:avLst/>
-          </a:prstGeom>
-          <a:noFill/>
-          <a:ln/>
-        </p:spPr>
-        <p:txBody>
-          <a:bodyPr wrap="square" lIns="0" tIns="0" rIns="0" bIns="0" rtlCol="0" anchor="t"/>
-          <a:lstStyle/>
-          <a:p>
-            <a:pPr algn="l" indent="0" marL="0">
-              <a:lnSpc>
-                <a:spcPts val="1680"/>
-              </a:lnSpc>
-              <a:spcBef>
-                <a:spcPts val="300"/>
-              </a:spcBef>
-              <a:spcAft>
-                <a:spcPts val="300"/>
-              </a:spcAft>
-              <a:buNone/>
-            </a:pPr>
-            <a:r>
-              <a:rPr lang="en-US" sz="1200" dirty="0">
-                <a:solidFill>
-                  <a:srgbClr val="1A1A1A"/>
-                </a:solidFill>
-                <a:latin typeface="Georgia" pitchFamily="34" charset="0"/>
-                <a:ea typeface="Georgia" pitchFamily="34" charset="-122"/>
-                <a:cs typeface="Georgia" pitchFamily="34" charset="-120"/>
-              </a:rPr>
-              <a:t>– Sūrya Namaskāra in its modern form: early 20th c. (Raja of Aundh, 1928).    – The strong-postural emphasis: Krishnamacharya (1888–1989), in Mysore Palace.    – The flow + breath co-ordination: 20th-c. innovation, partly inspired by Western physical culture.    – The international spread: Krishnamacharya's students Iyengar (1918–2014), Pattabhi Jois (1915–2009), Desikachar (1938–2016), TKV's daughter Indra Devi.</a:t>
-            </a:r>
-            <a:endParaRPr lang="en-US" sz="1200" dirty="0"/>
-          </a:p>
-        </p:txBody>
-      </p:sp>
-      <p:sp>
-        <p:nvSpPr>
-          <p:cNvPr id="8" name="Text 6"/>
-          <p:cNvSpPr/>
-          <p:nvPr/>
-        </p:nvSpPr>
-        <p:spPr>
-          <a:xfrm>
-            <a:off x="634901" y="3295650"/>
-            <a:ext cx="8102798" cy="281880"/>
-          </a:xfrm>
-          <a:prstGeom prst="rect">
-            <a:avLst/>
-          </a:prstGeom>
-          <a:noFill/>
-          <a:ln/>
-        </p:spPr>
-        <p:txBody>
-          <a:bodyPr wrap="square" lIns="0" tIns="0" rIns="0" bIns="0" rtlCol="0" anchor="t"/>
-          <a:lstStyle/>
-          <a:p>
-            <a:pPr algn="l" marL="342900" indent="-342900">
-              <a:lnSpc>
-                <a:spcPts val="1620"/>
-              </a:lnSpc>
-              <a:spcAft>
-                <a:spcPts val="300"/>
-              </a:spcAft>
-              <a:buSzPct val="100000"/>
-              <a:buChar char="•"/>
-            </a:pPr>
-            <a:r>
-              <a:rPr lang="en-US" sz="1200" b="1" dirty="0">
-                <a:solidFill>
-                  <a:srgbClr val="1A1A1A"/>
-                </a:solidFill>
-                <a:latin typeface="Georgia" pitchFamily="34" charset="0"/>
-                <a:ea typeface="Georgia" pitchFamily="34" charset="-122"/>
-                <a:cs typeface="Georgia" pitchFamily="34" charset="-120"/>
-              </a:rPr>
-              <a:t>What Singleton does NOT claim:</a:t>
-            </a:r>
-            <a:endParaRPr lang="en-US" sz="1200" dirty="0"/>
-          </a:p>
-        </p:txBody>
-      </p:sp>
-      <p:sp>
-        <p:nvSpPr>
-          <p:cNvPr id="9" name="Text 7"/>
-          <p:cNvSpPr/>
-          <p:nvPr/>
-        </p:nvSpPr>
-        <p:spPr>
-          <a:xfrm>
-            <a:off x="406301" y="3666381"/>
-            <a:ext cx="8498026" cy="639812"/>
-          </a:xfrm>
-          <a:prstGeom prst="rect">
-            <a:avLst/>
-          </a:prstGeom>
-          <a:noFill/>
-          <a:ln/>
-        </p:spPr>
-        <p:txBody>
-          <a:bodyPr wrap="square" lIns="0" tIns="0" rIns="0" bIns="0" rtlCol="0" anchor="t"/>
-          <a:lstStyle/>
-          <a:p>
-            <a:pPr algn="l" indent="0" marL="0">
-              <a:lnSpc>
-                <a:spcPts val="1680"/>
-              </a:lnSpc>
-              <a:spcBef>
-                <a:spcPts val="300"/>
-              </a:spcBef>
-              <a:spcAft>
-                <a:spcPts val="300"/>
-              </a:spcAft>
-              <a:buNone/>
-            </a:pPr>
-            <a:r>
-              <a:rPr lang="en-US" sz="1200" dirty="0">
-                <a:solidFill>
-                  <a:srgbClr val="1A1A1A"/>
-                </a:solidFill>
-                <a:latin typeface="Georgia" pitchFamily="34" charset="0"/>
-                <a:ea typeface="Georgia" pitchFamily="34" charset="-122"/>
-                <a:cs typeface="Georgia" pitchFamily="34" charset="-120"/>
-              </a:rPr>
-              <a:t>– Singleton does NOT say "yoga is fake." – Singleton does NOT say "Patañjali is recent." – Singleton does NOT say "Indians didn't invent yoga." – Singleton says: </a:t>
-            </a:r>
-            <a:pPr algn="l" indent="0" marL="0">
-              <a:lnSpc>
-                <a:spcPts val="1680"/>
-              </a:lnSpc>
-              <a:spcBef>
-                <a:spcPts val="300"/>
-              </a:spcBef>
-              <a:spcAft>
-                <a:spcPts val="300"/>
-              </a:spcAft>
-              <a:buNone/>
-            </a:pPr>
-            <a:r>
-              <a:rPr lang="en-US" sz="1200" i="1" dirty="0">
-                <a:solidFill>
-                  <a:srgbClr val="1A1A1A"/>
-                </a:solidFill>
-                <a:latin typeface="Georgia" pitchFamily="34" charset="0"/>
-                <a:ea typeface="Georgia" pitchFamily="34" charset="-122"/>
-                <a:cs typeface="Georgia" pitchFamily="34" charset="-120"/>
-              </a:rPr>
-              <a:t>the modern postural form is recent, even though many of its component techniques are old.</a:t>
-            </a:r>
-            <a:endParaRPr lang="en-US" sz="1200" dirty="0"/>
-          </a:p>
-        </p:txBody>
-      </p:sp>
-      <p:sp>
-        <p:nvSpPr>
-          <p:cNvPr id="10" name="Text 8"/>
-          <p:cNvSpPr/>
-          <p:nvPr/>
-        </p:nvSpPr>
-        <p:spPr>
-          <a:xfrm>
-            <a:off x="634901" y="4395043"/>
-            <a:ext cx="8102798" cy="281880"/>
-          </a:xfrm>
-          <a:prstGeom prst="rect">
-            <a:avLst/>
-          </a:prstGeom>
-          <a:noFill/>
-          <a:ln/>
-        </p:spPr>
-        <p:txBody>
-          <a:bodyPr wrap="square" lIns="0" tIns="0" rIns="0" bIns="0" rtlCol="0" anchor="t"/>
-          <a:lstStyle/>
-          <a:p>
-            <a:pPr algn="l" marL="342900" indent="-342900">
-              <a:lnSpc>
-                <a:spcPts val="1620"/>
-              </a:lnSpc>
-              <a:spcAft>
-                <a:spcPts val="300"/>
-              </a:spcAft>
-              <a:buSzPct val="100000"/>
-              <a:buChar char="•"/>
-            </a:pPr>
-            <a:r>
-              <a:rPr lang="en-US" sz="1200" b="1" dirty="0">
-                <a:solidFill>
-                  <a:srgbClr val="1A1A1A"/>
-                </a:solidFill>
-                <a:latin typeface="Georgia" pitchFamily="34" charset="0"/>
-                <a:ea typeface="Georgia" pitchFamily="34" charset="-122"/>
-                <a:cs typeface="Georgia" pitchFamily="34" charset="-120"/>
-              </a:rPr>
-              <a:t>Why this matters:</a:t>
-            </a:r>
-            <a:endParaRPr lang="en-US" sz="1200" dirty="0"/>
-          </a:p>
-        </p:txBody>
-      </p:sp>
-      <p:sp>
-        <p:nvSpPr>
-          <p:cNvPr id="11" name="Text 9"/>
-          <p:cNvSpPr/>
-          <p:nvPr/>
-        </p:nvSpPr>
-        <p:spPr>
-          <a:xfrm>
-            <a:off x="406301" y="4765774"/>
-            <a:ext cx="8498026" cy="639812"/>
-          </a:xfrm>
-          <a:prstGeom prst="rect">
-            <a:avLst/>
-          </a:prstGeom>
-          <a:noFill/>
-          <a:ln/>
-        </p:spPr>
-        <p:txBody>
-          <a:bodyPr wrap="square" lIns="0" tIns="0" rIns="0" bIns="0" rtlCol="0" anchor="t"/>
-          <a:lstStyle/>
-          <a:p>
-            <a:pPr algn="l" indent="0" marL="0">
-              <a:lnSpc>
-                <a:spcPts val="1680"/>
-              </a:lnSpc>
-              <a:spcBef>
-                <a:spcPts val="300"/>
-              </a:spcBef>
-              <a:spcAft>
-                <a:spcPts val="300"/>
-              </a:spcAft>
-              <a:buNone/>
-            </a:pPr>
-            <a:r>
-              <a:rPr lang="en-US" sz="1200" dirty="0">
-                <a:solidFill>
-                  <a:srgbClr val="1A1A1A"/>
-                </a:solidFill>
-                <a:latin typeface="Georgia" pitchFamily="34" charset="0"/>
-                <a:ea typeface="Georgia" pitchFamily="34" charset="-122"/>
-                <a:cs typeface="Georgia" pitchFamily="34" charset="-120"/>
-              </a:rPr>
-              <a:t>– For students: avoids the trap of either uncritical reverence or dismissive "it's all made-up." – For policy: NEP §4.6 ("Integration of IKS") works best when IKS is presented accurately, including the modern history. – For practice: knowing the history doesn't diminish the value. Modern postural yoga </a:t>
-            </a:r>
-            <a:pPr algn="l" indent="0" marL="0">
-              <a:lnSpc>
-                <a:spcPts val="1680"/>
-              </a:lnSpc>
-              <a:spcBef>
-                <a:spcPts val="300"/>
-              </a:spcBef>
-              <a:spcAft>
-                <a:spcPts val="300"/>
-              </a:spcAft>
-              <a:buNone/>
-            </a:pPr>
-            <a:r>
-              <a:rPr lang="en-US" sz="1200" i="1" dirty="0">
-                <a:solidFill>
-                  <a:srgbClr val="1A1A1A"/>
-                </a:solidFill>
-                <a:latin typeface="Georgia" pitchFamily="34" charset="0"/>
-                <a:ea typeface="Georgia" pitchFamily="34" charset="-122"/>
-                <a:cs typeface="Georgia" pitchFamily="34" charset="-120"/>
-              </a:rPr>
-              <a:t>works</a:t>
-            </a:r>
-            <a:pPr algn="l" indent="0" marL="0">
-              <a:lnSpc>
-                <a:spcPts val="1680"/>
-              </a:lnSpc>
-              <a:spcBef>
-                <a:spcPts val="300"/>
-              </a:spcBef>
-              <a:spcAft>
-                <a:spcPts val="300"/>
-              </a:spcAft>
-              <a:buNone/>
-            </a:pPr>
-            <a:r>
-              <a:rPr lang="en-US" sz="1200" dirty="0">
-                <a:solidFill>
-                  <a:srgbClr val="1A1A1A"/>
-                </a:solidFill>
-                <a:latin typeface="Georgia" pitchFamily="34" charset="0"/>
-                <a:ea typeface="Georgia" pitchFamily="34" charset="-122"/>
-                <a:cs typeface="Georgia" pitchFamily="34" charset="-120"/>
-              </a:rPr>
-              <a:t> — that's not in dispute.</a:t>
-            </a:r>
-            <a:endParaRPr lang="en-US" sz="1200" dirty="0"/>
-          </a:p>
-        </p:txBody>
-      </p:sp>
-      <p:sp>
-        <p:nvSpPr>
-          <p:cNvPr id="12" name="Text 10"/>
-          <p:cNvSpPr/>
-          <p:nvPr/>
-        </p:nvSpPr>
-        <p:spPr>
-          <a:xfrm>
-            <a:off x="406301" y="5557986"/>
+            <a:off x="406301" y="4434929"/>
             <a:ext cx="8498026" cy="213271"/>
           </a:xfrm>
           <a:prstGeom prst="rect">
@@ -3923,7 +4805,7 @@
                 <a:ea typeface="Times New Roman" pitchFamily="34" charset="-122"/>
                 <a:cs typeface="Times New Roman" pitchFamily="34" charset="-120"/>
               </a:rPr>
-              <a:t>Discussion (15 min)</a:t>
+              <a:t>Core (20 min)</a:t>
             </a:r>
             <a:endParaRPr lang="en-US" sz="1800" dirty="0"/>
           </a:p>
@@ -3938,7 +4820,7 @@
         <p:spPr>
           <a:xfrm>
             <a:off x="634901" y="883593"/>
-            <a:ext cx="8102798" cy="487561"/>
+            <a:ext cx="8102798" cy="281880"/>
           </a:xfrm>
           <a:prstGeom prst="rect">
             <a:avLst/>
@@ -3961,7 +4843,7 @@
               <a:buChar char="•"/>
             </a:pPr>
             <a:r>
-              <a:rPr lang="en-US" sz="1200" i="1" dirty="0">
+              <a:rPr lang="en-US" sz="1200" b="1" dirty="0">
                 <a:solidFill>
                   <a:srgbClr val="1A1A1A"/>
                 </a:solidFill>
@@ -3969,7 +4851,27 @@
                 <a:ea typeface="Georgia" pitchFamily="34" charset="-122"/>
                 <a:cs typeface="Georgia" pitchFamily="34" charset="-120"/>
               </a:rPr>
-              <a:t>"What is YOUR reaction to Singleton's thesis? Does it diminish yoga, enrich your understanding, or feel like Western academic attack?"</a:t>
+              <a:t>Singleton's thesis</a:t>
+            </a:r>
+            <a:pPr algn="l" indent="0" marL="0">
+              <a:lnSpc>
+                <a:spcPts val="1620"/>
+              </a:lnSpc>
+              <a:spcAft>
+                <a:spcPts val="300"/>
+              </a:spcAft>
+              <a:buNone/>
+            </a:pPr>
+            <a:r>
+              <a:rPr lang="en-US" sz="1200" dirty="0">
+                <a:solidFill>
+                  <a:srgbClr val="1A1A1A"/>
+                </a:solidFill>
+                <a:latin typeface="Georgia" pitchFamily="34" charset="0"/>
+                <a:ea typeface="Georgia" pitchFamily="34" charset="-122"/>
+                <a:cs typeface="Georgia" pitchFamily="34" charset="-120"/>
+              </a:rPr>
+              <a:t> (write on board):</a:t>
             </a:r>
             <a:endParaRPr lang="en-US" sz="1200" dirty="0"/>
           </a:p>
@@ -3983,8 +4885,61 @@
         </p:nvSpPr>
         <p:spPr>
           <a:xfrm>
-            <a:off x="406301" y="1460004"/>
-            <a:ext cx="8498026" cy="426541"/>
+            <a:off x="406301" y="1266974"/>
+            <a:ext cx="8331398" cy="1073944"/>
+          </a:xfrm>
+          <a:prstGeom prst="rect">
+            <a:avLst/>
+          </a:prstGeom>
+          <a:solidFill>
+            <a:srgbClr val="FFFFFF"/>
+          </a:solidFill>
+          <a:ln/>
+        </p:spPr>
+        <p:txBody>
+          <a:bodyPr wrap="square" rtlCol="0" anchor="ctr"/>
+          <a:lstStyle/>
+          <a:p>
+            <a:pPr indent="0" marL="0">
+              <a:buNone/>
+            </a:pPr>
+            <a:endParaRPr lang="en-US" dirty="0"/>
+          </a:p>
+        </p:txBody>
+      </p:sp>
+      <p:sp>
+        <p:nvSpPr>
+          <p:cNvPr id="6" name="Shape 4"/>
+          <p:cNvSpPr/>
+          <p:nvPr/>
+        </p:nvSpPr>
+        <p:spPr>
+          <a:xfrm>
+            <a:off x="434876" y="1266974"/>
+            <a:ext cx="0" cy="1073944"/>
+          </a:xfrm>
+          <a:prstGeom prst="line">
+            <a:avLst/>
+          </a:prstGeom>
+          <a:noFill/>
+          <a:ln w="57150">
+            <a:solidFill>
+              <a:srgbClr val="997929"/>
+            </a:solidFill>
+            <a:prstDash val="solid"/>
+          </a:ln>
+        </p:spPr>
+      </p:sp>
+      <p:sp>
+        <p:nvSpPr>
+          <p:cNvPr id="7" name="Text 5"/>
+          <p:cNvSpPr/>
+          <p:nvPr/>
+        </p:nvSpPr>
+        <p:spPr>
+          <a:xfrm>
+            <a:off x="692051" y="1457474"/>
+            <a:ext cx="7973389" cy="692944"/>
           </a:xfrm>
           <a:prstGeom prst="rect">
             <a:avLst/>
@@ -3998,7 +4953,7 @@
           <a:p>
             <a:pPr algn="l" indent="0" marL="0">
               <a:lnSpc>
-                <a:spcPts val="1680"/>
+                <a:spcPts val="1820"/>
               </a:lnSpc>
               <a:spcBef>
                 <a:spcPts val="300"/>
@@ -4009,46 +4964,23 @@
               <a:buNone/>
             </a:pPr>
             <a:r>
-              <a:rPr lang="en-US" sz="1200" dirty="0">
-                <a:solidFill>
-                  <a:srgbClr val="1A1A1A"/>
-                </a:solidFill>
-                <a:latin typeface="Georgia" pitchFamily="34" charset="0"/>
-                <a:ea typeface="Georgia" pitchFamily="34" charset="-122"/>
-                <a:cs typeface="Georgia" pitchFamily="34" charset="-120"/>
-              </a:rPr>
-              <a:t>– Hear from multiple students. Don't resolve the question. – Add: </a:t>
-            </a:r>
-            <a:pPr algn="l" indent="0" marL="0">
-              <a:lnSpc>
-                <a:spcPts val="1680"/>
-              </a:lnSpc>
-              <a:spcBef>
-                <a:spcPts val="300"/>
-              </a:spcBef>
-              <a:spcAft>
-                <a:spcPts val="300"/>
-              </a:spcAft>
-              <a:buNone/>
-            </a:pPr>
-            <a:r>
-              <a:rPr lang="en-US" sz="1200" i="1" dirty="0">
-                <a:solidFill>
-                  <a:srgbClr val="1A1A1A"/>
-                </a:solidFill>
-                <a:latin typeface="Georgia" pitchFamily="34" charset="0"/>
-                <a:ea typeface="Georgia" pitchFamily="34" charset="-122"/>
-                <a:cs typeface="Georgia" pitchFamily="34" charset="-120"/>
-              </a:rPr>
-              <a:t>"Singleton is a British scholar. Does that matter? Why or why not?"</a:t>
-            </a:r>
-            <a:endParaRPr lang="en-US" sz="1200" dirty="0"/>
-          </a:p>
-        </p:txBody>
-      </p:sp>
-      <p:sp>
-        <p:nvSpPr>
-          <p:cNvPr id="6" name="Text 4"/>
+              <a:rPr lang="en-US" sz="1300" i="1" dirty="0">
+                <a:solidFill>
+                  <a:srgbClr val="1A1A1A"/>
+                </a:solidFill>
+                <a:latin typeface="Times New Roman" pitchFamily="34" charset="0"/>
+                <a:ea typeface="Times New Roman" pitchFamily="34" charset="-122"/>
+                <a:cs typeface="Times New Roman" pitchFamily="34" charset="-120"/>
+              </a:rPr>
+              <a:t>Modern postural yoga, as taught in studios and schools worldwide today, is largely a 20th-century synthesis — drawing on classical Indian texts AND on European physical-culture movements that arrived in India during the colonial period (gymnastics, Swedish drill, bodybuilding, etc.).</a:t>
+            </a:r>
+            <a:endParaRPr lang="en-US" sz="1300" dirty="0"/>
+          </a:p>
+        </p:txBody>
+      </p:sp>
+      <p:sp>
+        <p:nvSpPr>
+          <p:cNvPr id="8" name="Text 6"/>
           <p:cNvSpPr/>
           <p:nvPr/>
         </p:nvSpPr>
@@ -4198,7 +5130,7 @@
                 <a:ea typeface="Times New Roman" pitchFamily="34" charset="-122"/>
                 <a:cs typeface="Times New Roman" pitchFamily="34" charset="-120"/>
               </a:rPr>
-              <a:t>Practice (5 min)</a:t>
+              <a:t>Core (20 min) (cont.)</a:t>
             </a:r>
             <a:endParaRPr lang="en-US" sz="1800" dirty="0"/>
           </a:p>
@@ -4212,8 +5144,8 @@
         </p:nvSpPr>
         <p:spPr>
           <a:xfrm>
-            <a:off x="406301" y="870942"/>
-            <a:ext cx="8498026" cy="213271"/>
+            <a:off x="634901" y="883593"/>
+            <a:ext cx="8102798" cy="281880"/>
           </a:xfrm>
           <a:prstGeom prst="rect">
             <a:avLst/>
@@ -4225,20 +5157,18 @@
           <a:bodyPr wrap="square" lIns="0" tIns="0" rIns="0" bIns="0" rtlCol="0" anchor="t"/>
           <a:lstStyle/>
           <a:p>
-            <a:pPr algn="l" indent="0" marL="0">
-              <a:lnSpc>
-                <a:spcPts val="1680"/>
-              </a:lnSpc>
-              <a:spcBef>
-                <a:spcPts val="300"/>
-              </a:spcBef>
-              <a:spcAft>
-                <a:spcPts val="300"/>
-              </a:spcAft>
-              <a:buNone/>
-            </a:pPr>
-            <a:r>
-              <a:rPr lang="en-US" sz="1200" dirty="0">
+            <a:pPr algn="l" marL="342900" indent="-342900">
+              <a:lnSpc>
+                <a:spcPts val="1620"/>
+              </a:lnSpc>
+              <a:spcAft>
+                <a:spcPts val="300"/>
+              </a:spcAft>
+              <a:buSzPct val="100000"/>
+              <a:buChar char="•"/>
+            </a:pPr>
+            <a:r>
+              <a:rPr lang="en-US" sz="1200" b="1" dirty="0">
                 <a:solidFill>
                   <a:srgbClr val="1A1A1A"/>
                 </a:solidFill>
@@ -4246,7 +5176,7 @@
                 <a:ea typeface="Georgia" pitchFamily="34" charset="-122"/>
                 <a:cs typeface="Georgia" pitchFamily="34" charset="-120"/>
               </a:rPr>
-              <a:t>Brief Sūrya Namaskāra — 1 round. Same body, fresh awareness.</a:t>
+              <a:t>Specific examples Singleton gives:</a:t>
             </a:r>
             <a:endParaRPr lang="en-US" sz="1200" dirty="0"/>
           </a:p>
@@ -4255,6 +5185,124 @@
       <p:sp>
         <p:nvSpPr>
           <p:cNvPr id="5" name="Text 3"/>
+          <p:cNvSpPr/>
+          <p:nvPr/>
+        </p:nvSpPr>
+        <p:spPr>
+          <a:xfrm>
+            <a:off x="634901" y="1266974"/>
+            <a:ext cx="8102798" cy="1218902"/>
+          </a:xfrm>
+          <a:prstGeom prst="rect">
+            <a:avLst/>
+          </a:prstGeom>
+          <a:noFill/>
+          <a:ln/>
+        </p:spPr>
+        <p:txBody>
+          <a:bodyPr wrap="square" lIns="0" tIns="0" rIns="0" bIns="0" rtlCol="0" anchor="t"/>
+          <a:lstStyle/>
+          <a:p>
+            <a:pPr algn="l" marL="342900" indent="-342900">
+              <a:lnSpc>
+                <a:spcPts val="1620"/>
+              </a:lnSpc>
+              <a:spcAft>
+                <a:spcPts val="300"/>
+              </a:spcAft>
+              <a:buSzPct val="100000"/>
+              <a:buChar char="•"/>
+            </a:pPr>
+            <a:r>
+              <a:rPr lang="en-US" sz="1200" dirty="0">
+                <a:solidFill>
+                  <a:srgbClr val="1A1A1A"/>
+                </a:solidFill>
+                <a:latin typeface="Georgia" pitchFamily="34" charset="0"/>
+                <a:ea typeface="Georgia" pitchFamily="34" charset="-122"/>
+                <a:cs typeface="Georgia" pitchFamily="34" charset="-120"/>
+              </a:rPr>
+              <a:t>Sūrya Namaskāra in its modern form: early 20th c. (Raja of Aundh, 1928).</a:t>
+            </a:r>
+            <a:endParaRPr lang="en-US" sz="1200" dirty="0"/>
+          </a:p>
+          <a:p>
+            <a:pPr algn="l" marL="342900" indent="-342900">
+              <a:lnSpc>
+                <a:spcPts val="1620"/>
+              </a:lnSpc>
+              <a:spcAft>
+                <a:spcPts val="300"/>
+              </a:spcAft>
+              <a:buSzPct val="100000"/>
+              <a:buChar char="•"/>
+            </a:pPr>
+            <a:r>
+              <a:rPr lang="en-US" sz="1200" dirty="0">
+                <a:solidFill>
+                  <a:srgbClr val="1A1A1A"/>
+                </a:solidFill>
+                <a:latin typeface="Georgia" pitchFamily="34" charset="0"/>
+                <a:ea typeface="Georgia" pitchFamily="34" charset="-122"/>
+                <a:cs typeface="Georgia" pitchFamily="34" charset="-120"/>
+              </a:rPr>
+              <a:t>The strong-postural emphasis: Krishnamacharya (1888–1989), in Mysore Palace.</a:t>
+            </a:r>
+            <a:endParaRPr lang="en-US" sz="1200" dirty="0"/>
+          </a:p>
+          <a:p>
+            <a:pPr algn="l" marL="342900" indent="-342900">
+              <a:lnSpc>
+                <a:spcPts val="1620"/>
+              </a:lnSpc>
+              <a:spcAft>
+                <a:spcPts val="300"/>
+              </a:spcAft>
+              <a:buSzPct val="100000"/>
+              <a:buChar char="•"/>
+            </a:pPr>
+            <a:r>
+              <a:rPr lang="en-US" sz="1200" dirty="0">
+                <a:solidFill>
+                  <a:srgbClr val="1A1A1A"/>
+                </a:solidFill>
+                <a:latin typeface="Georgia" pitchFamily="34" charset="0"/>
+                <a:ea typeface="Georgia" pitchFamily="34" charset="-122"/>
+                <a:cs typeface="Georgia" pitchFamily="34" charset="-120"/>
+              </a:rPr>
+              <a:t>The flow + breath co-ordination: 20th-c. innovation, partly inspired by Western physical culture.</a:t>
+            </a:r>
+            <a:endParaRPr lang="en-US" sz="1200" dirty="0"/>
+          </a:p>
+          <a:p>
+            <a:pPr algn="l" marL="342900" indent="-342900">
+              <a:lnSpc>
+                <a:spcPts val="1620"/>
+              </a:lnSpc>
+              <a:spcAft>
+                <a:spcPts val="300"/>
+              </a:spcAft>
+              <a:buSzPct val="100000"/>
+              <a:buChar char="•"/>
+            </a:pPr>
+            <a:r>
+              <a:rPr lang="en-US" sz="1200" dirty="0">
+                <a:solidFill>
+                  <a:srgbClr val="1A1A1A"/>
+                </a:solidFill>
+                <a:latin typeface="Georgia" pitchFamily="34" charset="0"/>
+                <a:ea typeface="Georgia" pitchFamily="34" charset="-122"/>
+                <a:cs typeface="Georgia" pitchFamily="34" charset="-120"/>
+              </a:rPr>
+              <a:t>The international spread: Krishnamacharya's students Iyengar (1918–2014), Pattabhi Jois (1915–2009), Desikachar (1938–2016), TKV's daughter Indra Devi.</a:t>
+            </a:r>
+            <a:endParaRPr lang="en-US" sz="1200" dirty="0"/>
+          </a:p>
+        </p:txBody>
+      </p:sp>
+      <p:sp>
+        <p:nvSpPr>
+          <p:cNvPr id="6" name="Text 4"/>
           <p:cNvSpPr/>
           <p:nvPr/>
         </p:nvSpPr>
@@ -4404,7 +5452,7 @@
                 <a:ea typeface="Times New Roman" pitchFamily="34" charset="-122"/>
                 <a:cs typeface="Times New Roman" pitchFamily="34" charset="-120"/>
               </a:rPr>
-              <a:t>Wrap-up (2 min)</a:t>
+              <a:t>Core (20 min) (cont.)</a:t>
             </a:r>
             <a:endParaRPr lang="en-US" sz="1800" dirty="0"/>
           </a:p>
@@ -4418,8 +5466,8 @@
         </p:nvSpPr>
         <p:spPr>
           <a:xfrm>
-            <a:off x="406301" y="870942"/>
-            <a:ext cx="8498026" cy="213271"/>
+            <a:off x="634901" y="883593"/>
+            <a:ext cx="8102798" cy="281880"/>
           </a:xfrm>
           <a:prstGeom prst="rect">
             <a:avLst/>
@@ -4431,20 +5479,18 @@
           <a:bodyPr wrap="square" lIns="0" tIns="0" rIns="0" bIns="0" rtlCol="0" anchor="t"/>
           <a:lstStyle/>
           <a:p>
-            <a:pPr algn="l" indent="0" marL="0">
-              <a:lnSpc>
-                <a:spcPts val="1680"/>
-              </a:lnSpc>
-              <a:spcBef>
-                <a:spcPts val="300"/>
-              </a:spcBef>
-              <a:spcAft>
-                <a:spcPts val="300"/>
-              </a:spcAft>
-              <a:buNone/>
-            </a:pPr>
-            <a:r>
-              <a:rPr lang="en-US" sz="1200" dirty="0">
+            <a:pPr algn="l" marL="342900" indent="-342900">
+              <a:lnSpc>
+                <a:spcPts val="1620"/>
+              </a:lnSpc>
+              <a:spcAft>
+                <a:spcPts val="300"/>
+              </a:spcAft>
+              <a:buSzPct val="100000"/>
+              <a:buChar char="•"/>
+            </a:pPr>
+            <a:r>
+              <a:rPr lang="en-US" sz="1200" b="1" dirty="0">
                 <a:solidFill>
                   <a:srgbClr val="1A1A1A"/>
                 </a:solidFill>
@@ -4452,22 +5498,45 @@
                 <a:ea typeface="Georgia" pitchFamily="34" charset="-122"/>
                 <a:cs typeface="Georgia" pitchFamily="34" charset="-120"/>
               </a:rPr>
-              <a:t>– Preview Day 8: </a:t>
-            </a:r>
-            <a:pPr algn="l" indent="0" marL="0">
-              <a:lnSpc>
-                <a:spcPts val="1680"/>
-              </a:lnSpc>
-              <a:spcBef>
-                <a:spcPts val="300"/>
-              </a:spcBef>
-              <a:spcAft>
-                <a:spcPts val="300"/>
-              </a:spcAft>
-              <a:buNone/>
-            </a:pPr>
-            <a:r>
-              <a:rPr lang="en-US" sz="1200" i="1" dirty="0">
+              <a:t>What Singleton does NOT claim:</a:t>
+            </a:r>
+            <a:endParaRPr lang="en-US" sz="1200" dirty="0"/>
+          </a:p>
+        </p:txBody>
+      </p:sp>
+      <p:sp>
+        <p:nvSpPr>
+          <p:cNvPr id="5" name="Text 3"/>
+          <p:cNvSpPr/>
+          <p:nvPr/>
+        </p:nvSpPr>
+        <p:spPr>
+          <a:xfrm>
+            <a:off x="634901" y="1266974"/>
+            <a:ext cx="8102798" cy="1013222"/>
+          </a:xfrm>
+          <a:prstGeom prst="rect">
+            <a:avLst/>
+          </a:prstGeom>
+          <a:noFill/>
+          <a:ln/>
+        </p:spPr>
+        <p:txBody>
+          <a:bodyPr wrap="square" lIns="0" tIns="0" rIns="0" bIns="0" rtlCol="0" anchor="t"/>
+          <a:lstStyle/>
+          <a:p>
+            <a:pPr algn="l" marL="342900" indent="-342900">
+              <a:lnSpc>
+                <a:spcPts val="1620"/>
+              </a:lnSpc>
+              <a:spcAft>
+                <a:spcPts val="300"/>
+              </a:spcAft>
+              <a:buSzPct val="100000"/>
+              <a:buChar char="•"/>
+            </a:pPr>
+            <a:r>
+              <a:rPr lang="en-US" sz="1200" dirty="0">
                 <a:solidFill>
                   <a:srgbClr val="1A1A1A"/>
                 </a:solidFill>
@@ -4475,15 +5544,107 @@
                 <a:ea typeface="Georgia" pitchFamily="34" charset="-122"/>
                 <a:cs typeface="Georgia" pitchFamily="34" charset="-120"/>
               </a:rPr>
-              <a:t>"Tomorrow — paper outlining."</a:t>
+              <a:t>Singleton does NOT say "yoga is fake."</a:t>
             </a:r>
             <a:endParaRPr lang="en-US" sz="1200" dirty="0"/>
           </a:p>
-        </p:txBody>
-      </p:sp>
-      <p:sp>
-        <p:nvSpPr>
-          <p:cNvPr id="5" name="Text 3"/>
+          <a:p>
+            <a:pPr algn="l" marL="342900" indent="-342900">
+              <a:lnSpc>
+                <a:spcPts val="1620"/>
+              </a:lnSpc>
+              <a:spcAft>
+                <a:spcPts val="300"/>
+              </a:spcAft>
+              <a:buSzPct val="100000"/>
+              <a:buChar char="•"/>
+            </a:pPr>
+            <a:r>
+              <a:rPr lang="en-US" sz="1200" dirty="0">
+                <a:solidFill>
+                  <a:srgbClr val="1A1A1A"/>
+                </a:solidFill>
+                <a:latin typeface="Georgia" pitchFamily="34" charset="0"/>
+                <a:ea typeface="Georgia" pitchFamily="34" charset="-122"/>
+                <a:cs typeface="Georgia" pitchFamily="34" charset="-120"/>
+              </a:rPr>
+              <a:t>Singleton does NOT say "Patañjali is recent."</a:t>
+            </a:r>
+            <a:endParaRPr lang="en-US" sz="1200" dirty="0"/>
+          </a:p>
+          <a:p>
+            <a:pPr algn="l" marL="342900" indent="-342900">
+              <a:lnSpc>
+                <a:spcPts val="1620"/>
+              </a:lnSpc>
+              <a:spcAft>
+                <a:spcPts val="300"/>
+              </a:spcAft>
+              <a:buSzPct val="100000"/>
+              <a:buChar char="•"/>
+            </a:pPr>
+            <a:r>
+              <a:rPr lang="en-US" sz="1200" dirty="0">
+                <a:solidFill>
+                  <a:srgbClr val="1A1A1A"/>
+                </a:solidFill>
+                <a:latin typeface="Georgia" pitchFamily="34" charset="0"/>
+                <a:ea typeface="Georgia" pitchFamily="34" charset="-122"/>
+                <a:cs typeface="Georgia" pitchFamily="34" charset="-120"/>
+              </a:rPr>
+              <a:t>Singleton does NOT say "Indians didn't invent yoga."</a:t>
+            </a:r>
+            <a:endParaRPr lang="en-US" sz="1200" dirty="0"/>
+          </a:p>
+          <a:p>
+            <a:pPr algn="l" marL="342900" indent="-342900">
+              <a:lnSpc>
+                <a:spcPts val="1620"/>
+              </a:lnSpc>
+              <a:spcAft>
+                <a:spcPts val="300"/>
+              </a:spcAft>
+              <a:buSzPct val="100000"/>
+              <a:buChar char="•"/>
+            </a:pPr>
+            <a:r>
+              <a:rPr lang="en-US" sz="1200" dirty="0">
+                <a:solidFill>
+                  <a:srgbClr val="1A1A1A"/>
+                </a:solidFill>
+                <a:latin typeface="Georgia" pitchFamily="34" charset="0"/>
+                <a:ea typeface="Georgia" pitchFamily="34" charset="-122"/>
+                <a:cs typeface="Georgia" pitchFamily="34" charset="-120"/>
+              </a:rPr>
+              <a:t>Singleton says: </a:t>
+            </a:r>
+            <a:pPr algn="l" indent="0" marL="0">
+              <a:lnSpc>
+                <a:spcPts val="1620"/>
+              </a:lnSpc>
+              <a:spcAft>
+                <a:spcPts val="300"/>
+              </a:spcAft>
+              <a:buNone/>
+            </a:pPr>
+            <a:r>
+              <a:rPr lang="en-US" sz="1200" i="1" dirty="0">
+                <a:solidFill>
+                  <a:srgbClr val="1A1A1A"/>
+                </a:solidFill>
+                <a:latin typeface="Georgia" pitchFamily="34" charset="0"/>
+                <a:ea typeface="Georgia" pitchFamily="34" charset="-122"/>
+                <a:cs typeface="Georgia" pitchFamily="34" charset="-120"/>
+              </a:rPr>
+              <a:t>the modern postural form is recent, even though many of its component techniques are old.</a:t>
+            </a:r>
+            <a:endParaRPr lang="en-US" sz="1200" dirty="0"/>
+          </a:p>
+        </p:txBody>
+      </p:sp>
+      <p:sp>
+        <p:nvSpPr>
+          <p:cNvPr id="6" name="Text 4"/>
           <p:cNvSpPr/>
           <p:nvPr/>
         </p:nvSpPr>
@@ -4633,7 +5794,7 @@
                 <a:ea typeface="Times New Roman" pitchFamily="34" charset="-122"/>
                 <a:cs typeface="Times New Roman" pitchFamily="34" charset="-120"/>
               </a:rPr>
-              <a:t>Differentiation</a:t>
+              <a:t>Core (20 min) (cont.)</a:t>
             </a:r>
             <a:endParaRPr lang="en-US" sz="1800" dirty="0"/>
           </a:p>
@@ -4648,7 +5809,7 @@
         <p:spPr>
           <a:xfrm>
             <a:off x="634901" y="883593"/>
-            <a:ext cx="8102798" cy="525661"/>
+            <a:ext cx="8102798" cy="281880"/>
           </a:xfrm>
           <a:prstGeom prst="rect">
             <a:avLst/>
@@ -4679,16 +5840,42 @@
                 <a:ea typeface="Georgia" pitchFamily="34" charset="-122"/>
                 <a:cs typeface="Georgia" pitchFamily="34" charset="-120"/>
               </a:rPr>
-              <a:t>Tier up:</a:t>
-            </a:r>
-            <a:pPr algn="l" indent="0" marL="0">
+              <a:t>Why this matters:</a:t>
+            </a:r>
+            <a:endParaRPr lang="en-US" sz="1200" dirty="0"/>
+          </a:p>
+        </p:txBody>
+      </p:sp>
+      <p:sp>
+        <p:nvSpPr>
+          <p:cNvPr id="5" name="Text 3"/>
+          <p:cNvSpPr/>
+          <p:nvPr/>
+        </p:nvSpPr>
+        <p:spPr>
+          <a:xfrm>
+            <a:off x="634901" y="1266974"/>
+            <a:ext cx="8102798" cy="769441"/>
+          </a:xfrm>
+          <a:prstGeom prst="rect">
+            <a:avLst/>
+          </a:prstGeom>
+          <a:noFill/>
+          <a:ln/>
+        </p:spPr>
+        <p:txBody>
+          <a:bodyPr wrap="square" lIns="0" tIns="0" rIns="0" bIns="0" rtlCol="0" anchor="t"/>
+          <a:lstStyle/>
+          <a:p>
+            <a:pPr algn="l" marL="342900" indent="-342900">
               <a:lnSpc>
                 <a:spcPts val="1620"/>
               </a:lnSpc>
               <a:spcAft>
                 <a:spcPts val="300"/>
               </a:spcAft>
-              <a:buNone/>
+              <a:buSzPct val="100000"/>
+              <a:buChar char="•"/>
             </a:pPr>
             <a:r>
               <a:rPr lang="en-US" sz="1200" dirty="0">
@@ -4699,7 +5886,7 @@
                 <a:ea typeface="Georgia" pitchFamily="34" charset="-122"/>
                 <a:cs typeface="Georgia" pitchFamily="34" charset="-120"/>
               </a:rPr>
-              <a:t> Read De Michelis (2004) too. Compare and contrast with Singleton.</a:t>
+              <a:t>For students: avoids the trap of either uncritical reverence or dismissive "it's all made-up."</a:t>
             </a:r>
             <a:endParaRPr lang="en-US" sz="1200" dirty="0"/>
           </a:p>
@@ -4715,7 +5902,7 @@
               <a:buChar char="•"/>
             </a:pPr>
             <a:r>
-              <a:rPr lang="en-US" sz="1200" b="1" dirty="0">
+              <a:rPr lang="en-US" sz="1200" dirty="0">
                 <a:solidFill>
                   <a:srgbClr val="1A1A1A"/>
                 </a:solidFill>
@@ -4723,16 +5910,20 @@
                 <a:ea typeface="Georgia" pitchFamily="34" charset="-122"/>
                 <a:cs typeface="Georgia" pitchFamily="34" charset="-120"/>
               </a:rPr>
-              <a:t>Tier down:</a:t>
-            </a:r>
-            <a:pPr algn="l" indent="0" marL="0">
+              <a:t>For policy: NEP §4.6 ("Integration of IKS") works best when IKS is presented accurately, including the modern history.</a:t>
+            </a:r>
+            <a:endParaRPr lang="en-US" sz="1200" dirty="0"/>
+          </a:p>
+          <a:p>
+            <a:pPr algn="l" marL="342900" indent="-342900">
               <a:lnSpc>
                 <a:spcPts val="1620"/>
               </a:lnSpc>
               <a:spcAft>
                 <a:spcPts val="300"/>
               </a:spcAft>
-              <a:buNone/>
+              <a:buSzPct val="100000"/>
+              <a:buChar char="•"/>
             </a:pPr>
             <a:r>
               <a:rPr lang="en-US" sz="1200" dirty="0">
@@ -4743,7 +5934,47 @@
                 <a:ea typeface="Georgia" pitchFamily="34" charset="-122"/>
                 <a:cs typeface="Georgia" pitchFamily="34" charset="-120"/>
               </a:rPr>
-              <a:t> Focus on Singleton's central thesis; the further reading can wait.</a:t>
+              <a:t>For practice: knowing the history doesn't diminish the value. Modern postural yoga </a:t>
+            </a:r>
+            <a:pPr algn="l" indent="0" marL="0">
+              <a:lnSpc>
+                <a:spcPts val="1620"/>
+              </a:lnSpc>
+              <a:spcAft>
+                <a:spcPts val="300"/>
+              </a:spcAft>
+              <a:buNone/>
+            </a:pPr>
+            <a:r>
+              <a:rPr lang="en-US" sz="1200" i="1" dirty="0">
+                <a:solidFill>
+                  <a:srgbClr val="1A1A1A"/>
+                </a:solidFill>
+                <a:latin typeface="Georgia" pitchFamily="34" charset="0"/>
+                <a:ea typeface="Georgia" pitchFamily="34" charset="-122"/>
+                <a:cs typeface="Georgia" pitchFamily="34" charset="-120"/>
+              </a:rPr>
+              <a:t>works</a:t>
+            </a:r>
+            <a:pPr algn="l" indent="0" marL="0">
+              <a:lnSpc>
+                <a:spcPts val="1620"/>
+              </a:lnSpc>
+              <a:spcAft>
+                <a:spcPts val="300"/>
+              </a:spcAft>
+              <a:buNone/>
+            </a:pPr>
+            <a:r>
+              <a:rPr lang="en-US" sz="1200" dirty="0">
+                <a:solidFill>
+                  <a:srgbClr val="1A1A1A"/>
+                </a:solidFill>
+                <a:latin typeface="Georgia" pitchFamily="34" charset="0"/>
+                <a:ea typeface="Georgia" pitchFamily="34" charset="-122"/>
+                <a:cs typeface="Georgia" pitchFamily="34" charset="-120"/>
+              </a:rPr>
+              <a:t> — that's not in dispute.</a:t>
             </a:r>
             <a:endParaRPr lang="en-US" sz="1200" dirty="0"/>
           </a:p>
@@ -4751,7 +5982,7 @@
       </p:sp>
       <p:sp>
         <p:nvSpPr>
-          <p:cNvPr id="5" name="Text 3"/>
+          <p:cNvPr id="6" name="Text 4"/>
           <p:cNvSpPr/>
           <p:nvPr/>
         </p:nvSpPr>
